--- a/MECH151_techDesign/slideDeck/MECH151_Unit_Reference_Deck.pptx
+++ b/MECH151_techDesign/slideDeck/MECH151_Unit_Reference_Deck.pptx
@@ -41,7 +41,6 @@
     <p:sldId id="293" r:id="rId39"/>
     <p:sldId id="294" r:id="rId40"/>
     <p:sldId id="295" r:id="rId41"/>
-    <p:sldId id="296" r:id="rId42"/>
     <p:sldId id="297" r:id="rId43"/>
     <p:sldId id="298" r:id="rId44"/>
     <p:sldId id="299" r:id="rId45"/>
@@ -3307,94 +3306,6 @@
             <a:fld id="{F7021451-1387-4CA6-816F-3879F97B5CBC}" type="slidenum">
               <a:rPr lang="en-US"/>
               <a:t>40</a:t>
-            </a:fld>
-            <a:endParaRPr lang="en-US"/>
-          </a:p>
-        </p:txBody>
-      </p:sp>
-    </p:spTree>
-    <p:extLst>
-      <p:ext uri="{BB962C8B-B14F-4D97-AF65-F5344CB8AC3E}">
-        <p14:creationId xmlns:p14="http://schemas.microsoft.com/office/powerpoint/2010/main" val="1024086991"/>
-      </p:ext>
-    </p:extLst>
-  </p:cSld>
-  <p:clrMapOvr>
-    <a:masterClrMapping/>
-  </p:clrMapOvr>
-</p:notes>
-</file>
-
-<file path=ppt/notesSlides/notesSlide41.xml><?xml version="1.0" encoding="utf-8"?>
-<p:notes xmlns:a="http://schemas.openxmlformats.org/drawingml/2006/main" xmlns:r="http://schemas.openxmlformats.org/officeDocument/2006/relationships" xmlns:p="http://schemas.openxmlformats.org/presentationml/2006/main">
-  <p:cSld>
-    <p:spTree>
-      <p:nvGrpSpPr>
-        <p:cNvPr id="1" name=""/>
-        <p:cNvGrpSpPr/>
-        <p:nvPr/>
-      </p:nvGrpSpPr>
-      <p:grpSpPr>
-        <a:xfrm>
-          <a:off x="0" y="0"/>
-          <a:ext cx="0" cy="0"/>
-          <a:chOff x="0" y="0"/>
-          <a:chExt cx="0" cy="0"/>
-        </a:xfrm>
-      </p:grpSpPr>
-      <p:sp>
-        <p:nvSpPr>
-          <p:cNvPr id="2" name="Slide Image Placeholder 1"/>
-          <p:cNvSpPr>
-            <a:spLocks noGrp="1" noRot="1" noChangeAspect="1"/>
-          </p:cNvSpPr>
-          <p:nvPr>
-            <p:ph type="sldImg"/>
-          </p:nvPr>
-        </p:nvSpPr>
-        <p:spPr/>
-      </p:sp>
-      <p:sp>
-        <p:nvSpPr>
-          <p:cNvPr id="3" name="Notes Placeholder 2"/>
-          <p:cNvSpPr>
-            <a:spLocks noGrp="1"/>
-          </p:cNvSpPr>
-          <p:nvPr>
-            <p:ph type="body" idx="1"/>
-          </p:nvPr>
-        </p:nvSpPr>
-        <p:spPr/>
-        <p:txBody>
-          <a:bodyPr/>
-          <a:lstStyle/>
-          <a:p>
-            <a:r>
-              <a:rPr lang="en-US" dirty="0"/>
-              <a:t/>
-            </a:r>
-            <a:endParaRPr lang="en-US" dirty="0"/>
-          </a:p>
-        </p:txBody>
-      </p:sp>
-      <p:sp>
-        <p:nvSpPr>
-          <p:cNvPr id="4" name="Slide Number Placeholder 3"/>
-          <p:cNvSpPr>
-            <a:spLocks noGrp="1"/>
-          </p:cNvSpPr>
-          <p:nvPr>
-            <p:ph type="sldNum" sz="quarter" idx="10"/>
-          </p:nvPr>
-        </p:nvSpPr>
-        <p:spPr/>
-        <p:txBody>
-          <a:bodyPr/>
-          <a:lstStyle/>
-          <a:p>
-            <a:fld id="{F7021451-1387-4CA6-816F-3879F97B5CBC}" type="slidenum">
-              <a:rPr lang="en-US"/>
-              <a:t>41</a:t>
             </a:fld>
             <a:endParaRPr lang="en-US"/>
           </a:p>
@@ -6270,7 +6181,7 @@
                 <a:ea typeface="Calibri" pitchFamily="34" charset="-122"/>
                 <a:cs typeface="Calibri" pitchFamily="34" charset="-120"/>
               </a:rPr>
-              <a:t>A student quick-reference for every unit — Design Fundamentals through Design for Manufacturing — for portfolio work, quizzes, and the final prototype.</a:t>
+              <a:t>A student quick-reference for every unit — Design Fundamentals through Design for Manufacturing — for portfolio work, competency checks, and the final prototype.</a:t>
             </a:r>
             <a:endParaRPr lang="en-US" sz="1400" dirty="0"/>
           </a:p>
@@ -9543,7 +9454,7 @@
         <p:spPr>
           <a:xfrm>
             <a:off x="685800" y="5806440"/>
-            <a:ext cx="1737360" cy="438912"/>
+            <a:ext cx="3383280" cy="438912"/>
           </a:xfrm>
           <a:prstGeom prst="roundRect">
             <a:avLst>
@@ -9574,7 +9485,7 @@
         <p:spPr>
           <a:xfrm>
             <a:off x="685800" y="5806440"/>
-            <a:ext cx="1737360" cy="438912"/>
+            <a:ext cx="3383280" cy="438912"/>
           </a:xfrm>
           <a:prstGeom prst="rect">
             <a:avLst/>
@@ -9598,7 +9509,7 @@
                 <a:ea typeface="Calibri" pitchFamily="34" charset="-122"/>
                 <a:cs typeface="Calibri" pitchFamily="34" charset="-120"/>
               </a:rPr>
-              <a:t>QUIZ IN WEEK 8</a:t>
+              <a:t>COMPETENCY CHECK IN WEEK 8</a:t>
             </a:r>
             <a:endParaRPr lang="en-US" sz="1300" dirty="0"/>
           </a:p>
@@ -15890,7 +15801,7 @@
                 <a:ea typeface="Calibri" pitchFamily="34" charset="-122"/>
                 <a:cs typeface="Calibri" pitchFamily="34" charset="-120"/>
               </a:rPr>
-              <a:t>Weeks 4–8 · Quiz Wk 8</a:t>
+              <a:t>Weeks 4–8 · Competency Check Wk 8</a:t>
             </a:r>
             <a:endParaRPr lang="en-US" sz="950" dirty="0"/>
           </a:p>
@@ -15955,7 +15866,7 @@
                 <a:ea typeface="Calibri" pitchFamily="34" charset="-122"/>
                 <a:cs typeface="Calibri" pitchFamily="34" charset="-120"/>
               </a:rPr>
-              <a:t>Weeks 8–11 · Quiz Wk 11</a:t>
+              <a:t>Weeks 8–11 · Competency Check Wk 11</a:t>
             </a:r>
             <a:endParaRPr lang="en-US" sz="950" dirty="0"/>
           </a:p>
@@ -16020,7 +15931,7 @@
                 <a:ea typeface="Calibri" pitchFamily="34" charset="-122"/>
                 <a:cs typeface="Calibri" pitchFamily="34" charset="-120"/>
               </a:rPr>
-              <a:t>Weeks 12–16 · Quiz Wk 16</a:t>
+              <a:t>Weeks 12–16 · Competency Check Wk 16</a:t>
             </a:r>
             <a:endParaRPr lang="en-US" sz="950" dirty="0"/>
           </a:p>
@@ -16490,7 +16401,7 @@
                 <a:ea typeface="Calibri" pitchFamily="34" charset="-122"/>
                 <a:cs typeface="Calibri" pitchFamily="34" charset="-120"/>
               </a:rPr>
-              <a:t>each unit maps to a graded portfolio module and closes with a unit quiz; the Design Portfolio (50% of the course grade) and the Prototype + Final Exam (30%) are graded separately — see the syllabus for the remaining weighting.</a:t>
+              <a:t>each unit maps to a graded portfolio module and closes with a unit competency check; the Design Portfolio (50% of the course grade) and the Prototype + Final Exam (30%) are graded separately — see the syllabus for the remaining weighting.</a:t>
             </a:r>
             <a:endParaRPr lang="en-US" sz="1250" dirty="0"/>
           </a:p>
@@ -24007,7 +23918,7 @@
                 <a:ea typeface="Calibri" pitchFamily="34" charset="-122"/>
                 <a:cs typeface="Calibri" pitchFamily="34" charset="-120"/>
               </a:rPr>
-              <a:t>Unit 1 Quiz (Week 8) and the corresponding portfolio modules.</a:t>
+              <a:t>Unit 1 Competency Check (Week 8) and the corresponding portfolio modules.</a:t>
             </a:r>
             <a:endParaRPr lang="en-US" sz="1200" dirty="0"/>
           </a:p>
@@ -26077,7 +25988,7 @@
         <p:spPr>
           <a:xfrm>
             <a:off x="685800" y="5806440"/>
-            <a:ext cx="1828800" cy="438912"/>
+            <a:ext cx="3383280" cy="438912"/>
           </a:xfrm>
           <a:prstGeom prst="roundRect">
             <a:avLst>
@@ -26108,7 +26019,7 @@
         <p:spPr>
           <a:xfrm>
             <a:off x="685800" y="5806440"/>
-            <a:ext cx="1828800" cy="438912"/>
+            <a:ext cx="3383280" cy="438912"/>
           </a:xfrm>
           <a:prstGeom prst="rect">
             <a:avLst/>
@@ -26132,7 +26043,7 @@
                 <a:ea typeface="Calibri" pitchFamily="34" charset="-122"/>
                 <a:cs typeface="Calibri" pitchFamily="34" charset="-120"/>
               </a:rPr>
-              <a:t>QUIZ IN WEEK 11</a:t>
+              <a:t>COMPETENCY CHECK IN WEEK 11</a:t>
             </a:r>
             <a:endParaRPr lang="en-US" sz="1300" dirty="0"/>
           </a:p>
@@ -29454,1415 +29365,6 @@
 
 <file path=ppt/slides/slide37.xml><?xml version="1.0" encoding="utf-8"?>
 <p:sld xmlns:a="http://schemas.openxmlformats.org/drawingml/2006/main" xmlns:r="http://schemas.openxmlformats.org/officeDocument/2006/relationships" xmlns:p="http://schemas.openxmlformats.org/presentationml/2006/main">
-  <p:cSld name="Slide 41">
-    <p:bg>
-      <p:bgPr>
-        <a:solidFill>
-          <a:srgbClr val="FFFFFF"/>
-        </a:solidFill>
-      </p:bgPr>
-    </p:bg>
-    <p:spTree>
-      <p:nvGrpSpPr>
-        <p:cNvPr id="1" name=""/>
-        <p:cNvGrpSpPr/>
-        <p:nvPr/>
-      </p:nvGrpSpPr>
-      <p:grpSpPr>
-        <a:xfrm>
-          <a:off x="0" y="0"/>
-          <a:ext cx="0" cy="0"/>
-          <a:chOff x="0" y="0"/>
-          <a:chExt cx="0" cy="0"/>
-        </a:xfrm>
-      </p:grpSpPr>
-      <p:sp>
-        <p:nvSpPr>
-          <p:cNvPr id="2" name="Shape 0"/>
-          <p:cNvSpPr/>
-          <p:nvPr/>
-        </p:nvSpPr>
-        <p:spPr>
-          <a:xfrm>
-            <a:off x="502920" y="411480"/>
-            <a:ext cx="757123" cy="310896"/>
-          </a:xfrm>
-          <a:prstGeom prst="roundRect">
-            <a:avLst>
-              <a:gd name="adj" fmla="val 50000"/>
-            </a:avLst>
-          </a:prstGeom>
-          <a:solidFill>
-            <a:srgbClr val="1E9E5A"/>
-          </a:solidFill>
-          <a:ln/>
-        </p:spPr>
-        <p:txBody>
-          <a:bodyPr/>
-          <a:p/>
-        </p:txBody>
-      </p:sp>
-      <p:sp>
-        <p:nvSpPr>
-          <p:cNvPr id="3" name="Text 1"/>
-          <p:cNvSpPr txBox="1"/>
-          <p:nvPr/>
-        </p:nvSpPr>
-        <p:spPr>
-          <a:xfrm>
-            <a:off x="502920" y="411480"/>
-            <a:ext cx="757123" cy="310896"/>
-          </a:xfrm>
-          <a:prstGeom prst="rect">
-            <a:avLst/>
-          </a:prstGeom>
-          <a:noFill/>
-          <a:ln/>
-        </p:spPr>
-        <p:txBody>
-          <a:bodyPr wrap="square" lIns="0" tIns="0" rIns="0" bIns="0" rtlCol="0" anchor="ctr"/>
-          <a:lstStyle/>
-          <a:p>
-            <a:pPr algn="ctr" indent="0" marL="0">
-              <a:buNone/>
-            </a:pPr>
-            <a:r>
-              <a:rPr lang="en-US" sz="1050" b="1" spc="50" kern="0" dirty="0">
-                <a:solidFill>
-                  <a:srgbClr val="FFFFFF"/>
-                </a:solidFill>
-                <a:latin typeface="Calibri" pitchFamily="34" charset="0"/>
-                <a:ea typeface="Calibri" pitchFamily="34" charset="-122"/>
-                <a:cs typeface="Calibri" pitchFamily="34" charset="-120"/>
-              </a:rPr>
-              <a:t>UNIT 2</a:t>
-            </a:r>
-            <a:endParaRPr lang="en-US" sz="1050" dirty="0"/>
-          </a:p>
-        </p:txBody>
-      </p:sp>
-      <p:sp>
-        <p:nvSpPr>
-          <p:cNvPr id="4" name="Text 2"/>
-          <p:cNvSpPr txBox="1"/>
-          <p:nvPr/>
-        </p:nvSpPr>
-        <p:spPr>
-          <a:xfrm>
-            <a:off x="502920" y="768096"/>
-            <a:ext cx="11155680" cy="603504"/>
-          </a:xfrm>
-          <a:prstGeom prst="rect">
-            <a:avLst/>
-          </a:prstGeom>
-          <a:noFill/>
-          <a:ln/>
-        </p:spPr>
-        <p:txBody>
-          <a:bodyPr wrap="square" lIns="0" tIns="0" rIns="0" bIns="0" rtlCol="0" anchor="ctr"/>
-          <a:lstStyle/>
-          <a:p>
-            <a:pPr indent="0" marL="0">
-              <a:buNone/>
-            </a:pPr>
-            <a:r>
-              <a:rPr lang="en-US" sz="2600" b="1" dirty="0">
-                <a:solidFill>
-                  <a:srgbClr val="0F2942"/>
-                </a:solidFill>
-                <a:latin typeface="Cambria" pitchFamily="34" charset="0"/>
-                <a:ea typeface="Cambria" pitchFamily="34" charset="-122"/>
-                <a:cs typeface="Cambria" pitchFamily="34" charset="-120"/>
-              </a:rPr>
-              <a:t>Assembly Drawings</a:t>
-            </a:r>
-            <a:endParaRPr lang="en-US" sz="2600" dirty="0"/>
-          </a:p>
-        </p:txBody>
-      </p:sp>
-      <p:sp>
-        <p:nvSpPr>
-          <p:cNvPr id="5" name="Text 3"/>
-          <p:cNvSpPr txBox="1"/>
-          <p:nvPr/>
-        </p:nvSpPr>
-        <p:spPr>
-          <a:xfrm>
-            <a:off x="502920" y="1298448"/>
-            <a:ext cx="11155680" cy="365760"/>
-          </a:xfrm>
-          <a:prstGeom prst="rect">
-            <a:avLst/>
-          </a:prstGeom>
-          <a:noFill/>
-          <a:ln/>
-        </p:spPr>
-        <p:txBody>
-          <a:bodyPr wrap="square" lIns="0" tIns="0" rIns="0" bIns="0" rtlCol="0" anchor="ctr"/>
-          <a:lstStyle/>
-          <a:p>
-            <a:pPr indent="0" marL="0">
-              <a:buNone/>
-            </a:pPr>
-            <a:r>
-              <a:rPr lang="en-US" sz="1250" i="1" dirty="0">
-                <a:solidFill>
-                  <a:srgbClr val="8592A3"/>
-                </a:solidFill>
-                <a:latin typeface="Calibri" pitchFamily="34" charset="0"/>
-                <a:ea typeface="Calibri" pitchFamily="34" charset="-122"/>
-                <a:cs typeface="Calibri" pitchFamily="34" charset="-120"/>
-              </a:rPr>
-              <a:t>An assembly drawing shows how parts go together — exploded, numbered, and tied to a parts list.</a:t>
-            </a:r>
-            <a:endParaRPr lang="en-US" sz="1250" dirty="0"/>
-          </a:p>
-        </p:txBody>
-      </p:sp>
-      <p:sp>
-        <p:nvSpPr>
-          <p:cNvPr id="6" name="Text 4"/>
-          <p:cNvSpPr txBox="1"/>
-          <p:nvPr/>
-        </p:nvSpPr>
-        <p:spPr>
-          <a:xfrm>
-            <a:off x="502920" y="6565392"/>
-            <a:ext cx="7315200" cy="256032"/>
-          </a:xfrm>
-          <a:prstGeom prst="rect">
-            <a:avLst/>
-          </a:prstGeom>
-          <a:noFill/>
-          <a:ln/>
-        </p:spPr>
-        <p:txBody>
-          <a:bodyPr wrap="square" lIns="0" tIns="0" rIns="0" bIns="0" rtlCol="0" anchor="ctr"/>
-          <a:lstStyle/>
-          <a:p>
-            <a:pPr indent="0" marL="0">
-              <a:buNone/>
-            </a:pPr>
-            <a:r>
-              <a:rPr lang="en-US" sz="850" dirty="0">
-                <a:solidFill>
-                  <a:srgbClr val="8592A3"/>
-                </a:solidFill>
-                <a:latin typeface="Calibri" pitchFamily="34" charset="0"/>
-                <a:ea typeface="Calibri" pitchFamily="34" charset="-122"/>
-                <a:cs typeface="Calibri" pitchFamily="34" charset="-120"/>
-              </a:rPr>
-              <a:t>MECH 151 · Technical Design — Unit Reference Guide</a:t>
-            </a:r>
-            <a:endParaRPr lang="en-US" sz="850" dirty="0"/>
-          </a:p>
-        </p:txBody>
-      </p:sp>
-      <p:sp>
-        <p:nvSpPr>
-          <p:cNvPr id="7" name="Shape 5"/>
-          <p:cNvSpPr/>
-          <p:nvPr/>
-        </p:nvSpPr>
-        <p:spPr>
-          <a:xfrm>
-            <a:off x="502920" y="1783080"/>
-            <a:ext cx="5760720" cy="4434840"/>
-          </a:xfrm>
-          <a:prstGeom prst="roundRect">
-            <a:avLst>
-              <a:gd name="adj" fmla="val 1443"/>
-            </a:avLst>
-          </a:prstGeom>
-          <a:solidFill>
-            <a:srgbClr val="F3F6F9"/>
-          </a:solidFill>
-          <a:ln w="12700">
-            <a:solidFill>
-              <a:srgbClr val="E1E7EE"/>
-            </a:solidFill>
-            <a:prstDash val="solid"/>
-          </a:ln>
-        </p:spPr>
-        <p:txBody>
-          <a:bodyPr/>
-          <a:p/>
-        </p:txBody>
-      </p:sp>
-      <p:pic>
-        <p:nvPicPr>
-          <p:cNvPr id="8" name="Image 0" descr="/tmp/mech151_deck/images/28_exploded_view.png">    </p:cNvPr>
-          <p:cNvPicPr>
-            <a:picLocks noChangeAspect="1"/>
-          </p:cNvPicPr>
-          <p:nvPr/>
-        </p:nvPicPr>
-        <p:blipFill>
-          <a:blip r:embed="rId1"/>
-          <a:stretch>
-            <a:fillRect/>
-          </a:stretch>
-        </p:blipFill>
-        <p:spPr>
-          <a:xfrm>
-            <a:off x="1709380" y="1920240"/>
-            <a:ext cx="3347800" cy="3840480"/>
-          </a:xfrm>
-          <a:prstGeom prst="rect">
-            <a:avLst/>
-          </a:prstGeom>
-        </p:spPr>
-      </p:pic>
-      <p:sp>
-        <p:nvSpPr>
-          <p:cNvPr id="9" name="Text 6"/>
-          <p:cNvSpPr txBox="1"/>
-          <p:nvPr/>
-        </p:nvSpPr>
-        <p:spPr>
-          <a:xfrm>
-            <a:off x="731520" y="5760720"/>
-            <a:ext cx="5303520" cy="384048"/>
-          </a:xfrm>
-          <a:prstGeom prst="rect">
-            <a:avLst/>
-          </a:prstGeom>
-          <a:noFill/>
-          <a:ln/>
-        </p:spPr>
-        <p:txBody>
-          <a:bodyPr wrap="square" lIns="0" tIns="0" rIns="0" bIns="0" rtlCol="0" anchor="t"/>
-          <a:lstStyle/>
-          <a:p>
-            <a:pPr algn="ctr" indent="0" marL="0">
-              <a:lnSpc>
-                <a:spcPct val="110000"/>
-              </a:lnSpc>
-              <a:buNone/>
-            </a:pPr>
-            <a:r>
-              <a:rPr lang="en-US" sz="950" i="1" dirty="0">
-                <a:solidFill>
-                  <a:srgbClr val="8592A3"/>
-                </a:solidFill>
-                <a:latin typeface="Calibri" pitchFamily="34" charset="0"/>
-                <a:ea typeface="Calibri" pitchFamily="34" charset="-122"/>
-                <a:cs typeface="Calibri" pitchFamily="34" charset="-120"/>
-              </a:rPr>
-              <a:t>Balloon numbers are assigned in assembly order and match the item numbers in the parts list at right.</a:t>
-            </a:r>
-            <a:endParaRPr lang="en-US" sz="950" dirty="0"/>
-          </a:p>
-        </p:txBody>
-      </p:sp>
-      <p:sp>
-        <p:nvSpPr>
-          <p:cNvPr id="10" name="Shape 7"/>
-          <p:cNvSpPr/>
-          <p:nvPr/>
-        </p:nvSpPr>
-        <p:spPr>
-          <a:xfrm>
-            <a:off x="6492240" y="1783080"/>
-            <a:ext cx="5212080" cy="4434840"/>
-          </a:xfrm>
-          <a:prstGeom prst="roundRect">
-            <a:avLst>
-              <a:gd name="adj" fmla="val 1443"/>
-            </a:avLst>
-          </a:prstGeom>
-          <a:solidFill>
-            <a:srgbClr val="F3F6F9"/>
-          </a:solidFill>
-          <a:ln w="12700">
-            <a:solidFill>
-              <a:srgbClr val="E1E7EE"/>
-            </a:solidFill>
-            <a:prstDash val="solid"/>
-          </a:ln>
-        </p:spPr>
-        <p:txBody>
-          <a:bodyPr/>
-          <a:p/>
-        </p:txBody>
-      </p:sp>
-      <p:sp>
-        <p:nvSpPr>
-          <p:cNvPr id="11" name="Text 8"/>
-          <p:cNvSpPr txBox="1"/>
-          <p:nvPr/>
-        </p:nvSpPr>
-        <p:spPr>
-          <a:xfrm>
-            <a:off x="6720840" y="1965960"/>
-            <a:ext cx="4754880" cy="320040"/>
-          </a:xfrm>
-          <a:prstGeom prst="rect">
-            <a:avLst/>
-          </a:prstGeom>
-          <a:noFill/>
-          <a:ln/>
-        </p:spPr>
-        <p:txBody>
-          <a:bodyPr wrap="square" lIns="0" tIns="0" rIns="0" bIns="0" rtlCol="0" anchor="ctr"/>
-          <a:lstStyle/>
-          <a:p>
-            <a:pPr indent="0" marL="0">
-              <a:buNone/>
-            </a:pPr>
-            <a:r>
-              <a:rPr lang="en-US" sz="1550" b="1" dirty="0">
-                <a:solidFill>
-                  <a:srgbClr val="1E9E5A"/>
-                </a:solidFill>
-                <a:latin typeface="Cambria" pitchFamily="34" charset="0"/>
-                <a:ea typeface="Cambria" pitchFamily="34" charset="-122"/>
-                <a:cs typeface="Cambria" pitchFamily="34" charset="-120"/>
-              </a:rPr>
-              <a:t>Bill of Materials</a:t>
-            </a:r>
-            <a:endParaRPr lang="en-US" sz="1550" dirty="0"/>
-          </a:p>
-        </p:txBody>
-      </p:sp>
-      <p:sp>
-        <p:nvSpPr>
-          <p:cNvPr id="12" name="Shape 9"/>
-          <p:cNvSpPr/>
-          <p:nvPr/>
-        </p:nvSpPr>
-        <p:spPr>
-          <a:xfrm>
-            <a:off x="6720840" y="2423160"/>
-            <a:ext cx="4754880" cy="292608"/>
-          </a:xfrm>
-          <a:prstGeom prst="rect">
-            <a:avLst/>
-          </a:prstGeom>
-          <a:solidFill>
-            <a:srgbClr val="0F2942"/>
-          </a:solidFill>
-          <a:ln/>
-        </p:spPr>
-        <p:txBody>
-          <a:bodyPr/>
-          <a:p/>
-        </p:txBody>
-      </p:sp>
-      <p:sp>
-        <p:nvSpPr>
-          <p:cNvPr id="13" name="Text 10"/>
-          <p:cNvSpPr txBox="1"/>
-          <p:nvPr/>
-        </p:nvSpPr>
-        <p:spPr>
-          <a:xfrm>
-            <a:off x="6775704" y="2423160"/>
-            <a:ext cx="393192" cy="292608"/>
-          </a:xfrm>
-          <a:prstGeom prst="rect">
-            <a:avLst/>
-          </a:prstGeom>
-          <a:noFill/>
-          <a:ln/>
-        </p:spPr>
-        <p:txBody>
-          <a:bodyPr wrap="square" lIns="0" tIns="0" rIns="0" bIns="0" rtlCol="0" anchor="ctr"/>
-          <a:lstStyle/>
-          <a:p>
-            <a:pPr algn="ctr" indent="0" marL="0">
-              <a:buNone/>
-            </a:pPr>
-            <a:r>
-              <a:rPr lang="en-US" sz="950" b="1" dirty="0">
-                <a:solidFill>
-                  <a:srgbClr val="FFFFFF"/>
-                </a:solidFill>
-                <a:latin typeface="Calibri" pitchFamily="34" charset="0"/>
-                <a:ea typeface="Calibri" pitchFamily="34" charset="-122"/>
-                <a:cs typeface="Calibri" pitchFamily="34" charset="-120"/>
-              </a:rPr>
-              <a:t>ITEM</a:t>
-            </a:r>
-            <a:endParaRPr lang="en-US" sz="950" dirty="0"/>
-          </a:p>
-        </p:txBody>
-      </p:sp>
-      <p:sp>
-        <p:nvSpPr>
-          <p:cNvPr id="14" name="Text 11"/>
-          <p:cNvSpPr txBox="1"/>
-          <p:nvPr/>
-        </p:nvSpPr>
-        <p:spPr>
-          <a:xfrm>
-            <a:off x="7278624" y="2423160"/>
-            <a:ext cx="941832" cy="292608"/>
-          </a:xfrm>
-          <a:prstGeom prst="rect">
-            <a:avLst/>
-          </a:prstGeom>
-          <a:noFill/>
-          <a:ln/>
-        </p:spPr>
-        <p:txBody>
-          <a:bodyPr wrap="square" lIns="0" tIns="0" rIns="0" bIns="0" rtlCol="0" anchor="ctr"/>
-          <a:lstStyle/>
-          <a:p>
-            <a:pPr algn="ctr" indent="0" marL="0">
-              <a:buNone/>
-            </a:pPr>
-            <a:r>
-              <a:rPr lang="en-US" sz="950" b="1" dirty="0">
-                <a:solidFill>
-                  <a:srgbClr val="FFFFFF"/>
-                </a:solidFill>
-                <a:latin typeface="Calibri" pitchFamily="34" charset="0"/>
-                <a:ea typeface="Calibri" pitchFamily="34" charset="-122"/>
-                <a:cs typeface="Calibri" pitchFamily="34" charset="-120"/>
-              </a:rPr>
-              <a:t>PART NO.</a:t>
-            </a:r>
-            <a:endParaRPr lang="en-US" sz="950" dirty="0"/>
-          </a:p>
-        </p:txBody>
-      </p:sp>
-      <p:sp>
-        <p:nvSpPr>
-          <p:cNvPr id="15" name="Text 12"/>
-          <p:cNvSpPr txBox="1"/>
-          <p:nvPr/>
-        </p:nvSpPr>
-        <p:spPr>
-          <a:xfrm>
-            <a:off x="8330184" y="2423160"/>
-            <a:ext cx="2587752" cy="292608"/>
-          </a:xfrm>
-          <a:prstGeom prst="rect">
-            <a:avLst/>
-          </a:prstGeom>
-          <a:noFill/>
-          <a:ln/>
-        </p:spPr>
-        <p:txBody>
-          <a:bodyPr wrap="square" lIns="0" tIns="0" rIns="0" bIns="0" rtlCol="0" anchor="ctr"/>
-          <a:lstStyle/>
-          <a:p>
-            <a:pPr algn="l" indent="0" marL="0">
-              <a:buNone/>
-            </a:pPr>
-            <a:r>
-              <a:rPr lang="en-US" sz="950" b="1" dirty="0">
-                <a:solidFill>
-                  <a:srgbClr val="FFFFFF"/>
-                </a:solidFill>
-                <a:latin typeface="Calibri" pitchFamily="34" charset="0"/>
-                <a:ea typeface="Calibri" pitchFamily="34" charset="-122"/>
-                <a:cs typeface="Calibri" pitchFamily="34" charset="-120"/>
-              </a:rPr>
-              <a:t>DESCRIPTION</a:t>
-            </a:r>
-            <a:endParaRPr lang="en-US" sz="950" dirty="0"/>
-          </a:p>
-        </p:txBody>
-      </p:sp>
-      <p:sp>
-        <p:nvSpPr>
-          <p:cNvPr id="16" name="Text 13"/>
-          <p:cNvSpPr txBox="1"/>
-          <p:nvPr/>
-        </p:nvSpPr>
-        <p:spPr>
-          <a:xfrm>
-            <a:off x="11027664" y="2423160"/>
-            <a:ext cx="393192" cy="292608"/>
-          </a:xfrm>
-          <a:prstGeom prst="rect">
-            <a:avLst/>
-          </a:prstGeom>
-          <a:noFill/>
-          <a:ln/>
-        </p:spPr>
-        <p:txBody>
-          <a:bodyPr wrap="square" lIns="0" tIns="0" rIns="0" bIns="0" rtlCol="0" anchor="ctr"/>
-          <a:lstStyle/>
-          <a:p>
-            <a:pPr algn="ctr" indent="0" marL="0">
-              <a:buNone/>
-            </a:pPr>
-            <a:r>
-              <a:rPr lang="en-US" sz="950" b="1" dirty="0">
-                <a:solidFill>
-                  <a:srgbClr val="FFFFFF"/>
-                </a:solidFill>
-                <a:latin typeface="Calibri" pitchFamily="34" charset="0"/>
-                <a:ea typeface="Calibri" pitchFamily="34" charset="-122"/>
-                <a:cs typeface="Calibri" pitchFamily="34" charset="-120"/>
-              </a:rPr>
-              <a:t>QTY</a:t>
-            </a:r>
-            <a:endParaRPr lang="en-US" sz="950" dirty="0"/>
-          </a:p>
-        </p:txBody>
-      </p:sp>
-      <p:sp>
-        <p:nvSpPr>
-          <p:cNvPr id="17" name="Text 14"/>
-          <p:cNvSpPr txBox="1"/>
-          <p:nvPr/>
-        </p:nvSpPr>
-        <p:spPr>
-          <a:xfrm>
-            <a:off x="6775704" y="2715768"/>
-            <a:ext cx="393192" cy="475488"/>
-          </a:xfrm>
-          <a:prstGeom prst="rect">
-            <a:avLst/>
-          </a:prstGeom>
-          <a:noFill/>
-          <a:ln/>
-        </p:spPr>
-        <p:txBody>
-          <a:bodyPr wrap="square" lIns="0" tIns="0" rIns="0" bIns="0" rtlCol="0" anchor="ctr"/>
-          <a:lstStyle/>
-          <a:p>
-            <a:pPr algn="ctr" indent="0" marL="0">
-              <a:buNone/>
-            </a:pPr>
-            <a:r>
-              <a:rPr lang="en-US" sz="1050" b="1" dirty="0">
-                <a:solidFill>
-                  <a:srgbClr val="44536B"/>
-                </a:solidFill>
-                <a:latin typeface="Calibri" pitchFamily="34" charset="0"/>
-                <a:ea typeface="Calibri" pitchFamily="34" charset="-122"/>
-                <a:cs typeface="Calibri" pitchFamily="34" charset="-120"/>
-              </a:rPr>
-              <a:t>1</a:t>
-            </a:r>
-            <a:endParaRPr lang="en-US" sz="1050" dirty="0"/>
-          </a:p>
-        </p:txBody>
-      </p:sp>
-      <p:sp>
-        <p:nvSpPr>
-          <p:cNvPr id="18" name="Text 15"/>
-          <p:cNvSpPr txBox="1"/>
-          <p:nvPr/>
-        </p:nvSpPr>
-        <p:spPr>
-          <a:xfrm>
-            <a:off x="7278624" y="2715768"/>
-            <a:ext cx="941832" cy="475488"/>
-          </a:xfrm>
-          <a:prstGeom prst="rect">
-            <a:avLst/>
-          </a:prstGeom>
-          <a:noFill/>
-          <a:ln/>
-        </p:spPr>
-        <p:txBody>
-          <a:bodyPr wrap="square" lIns="0" tIns="0" rIns="0" bIns="0" rtlCol="0" anchor="ctr"/>
-          <a:lstStyle/>
-          <a:p>
-            <a:pPr algn="ctr" indent="0" marL="0">
-              <a:buNone/>
-            </a:pPr>
-            <a:r>
-              <a:rPr lang="en-US" sz="1050" dirty="0">
-                <a:solidFill>
-                  <a:srgbClr val="44536B"/>
-                </a:solidFill>
-                <a:latin typeface="Calibri" pitchFamily="34" charset="0"/>
-                <a:ea typeface="Calibri" pitchFamily="34" charset="-122"/>
-                <a:cs typeface="Calibri" pitchFamily="34" charset="-120"/>
-              </a:rPr>
-              <a:t>HW-0425</a:t>
-            </a:r>
-            <a:endParaRPr lang="en-US" sz="1050" dirty="0"/>
-          </a:p>
-        </p:txBody>
-      </p:sp>
-      <p:sp>
-        <p:nvSpPr>
-          <p:cNvPr id="19" name="Text 16"/>
-          <p:cNvSpPr txBox="1"/>
-          <p:nvPr/>
-        </p:nvSpPr>
-        <p:spPr>
-          <a:xfrm>
-            <a:off x="8330184" y="2715768"/>
-            <a:ext cx="2587752" cy="475488"/>
-          </a:xfrm>
-          <a:prstGeom prst="rect">
-            <a:avLst/>
-          </a:prstGeom>
-          <a:noFill/>
-          <a:ln/>
-        </p:spPr>
-        <p:txBody>
-          <a:bodyPr wrap="square" lIns="0" tIns="0" rIns="0" bIns="0" rtlCol="0" anchor="ctr"/>
-          <a:lstStyle/>
-          <a:p>
-            <a:pPr algn="l" indent="0" marL="0">
-              <a:buNone/>
-            </a:pPr>
-            <a:r>
-              <a:rPr lang="en-US" sz="1050" dirty="0">
-                <a:solidFill>
-                  <a:srgbClr val="0F2942"/>
-                </a:solidFill>
-                <a:latin typeface="Calibri" pitchFamily="34" charset="0"/>
-                <a:ea typeface="Calibri" pitchFamily="34" charset="-122"/>
-                <a:cs typeface="Calibri" pitchFamily="34" charset="-120"/>
-              </a:rPr>
-              <a:t>Socket head cap screw, M4 × 12</a:t>
-            </a:r>
-            <a:endParaRPr lang="en-US" sz="1050" dirty="0"/>
-          </a:p>
-        </p:txBody>
-      </p:sp>
-      <p:sp>
-        <p:nvSpPr>
-          <p:cNvPr id="20" name="Text 17"/>
-          <p:cNvSpPr txBox="1"/>
-          <p:nvPr/>
-        </p:nvSpPr>
-        <p:spPr>
-          <a:xfrm>
-            <a:off x="11027664" y="2715768"/>
-            <a:ext cx="393192" cy="475488"/>
-          </a:xfrm>
-          <a:prstGeom prst="rect">
-            <a:avLst/>
-          </a:prstGeom>
-          <a:noFill/>
-          <a:ln/>
-        </p:spPr>
-        <p:txBody>
-          <a:bodyPr wrap="square" lIns="0" tIns="0" rIns="0" bIns="0" rtlCol="0" anchor="ctr"/>
-          <a:lstStyle/>
-          <a:p>
-            <a:pPr algn="ctr" indent="0" marL="0">
-              <a:buNone/>
-            </a:pPr>
-            <a:r>
-              <a:rPr lang="en-US" sz="1050" dirty="0">
-                <a:solidFill>
-                  <a:srgbClr val="44536B"/>
-                </a:solidFill>
-                <a:latin typeface="Calibri" pitchFamily="34" charset="0"/>
-                <a:ea typeface="Calibri" pitchFamily="34" charset="-122"/>
-                <a:cs typeface="Calibri" pitchFamily="34" charset="-120"/>
-              </a:rPr>
-              <a:t>4</a:t>
-            </a:r>
-            <a:endParaRPr lang="en-US" sz="1050" dirty="0"/>
-          </a:p>
-        </p:txBody>
-      </p:sp>
-      <p:sp>
-        <p:nvSpPr>
-          <p:cNvPr id="21" name="Shape 18"/>
-          <p:cNvSpPr/>
-          <p:nvPr/>
-        </p:nvSpPr>
-        <p:spPr>
-          <a:xfrm>
-            <a:off x="6720840" y="3191256"/>
-            <a:ext cx="4754880" cy="0"/>
-          </a:xfrm>
-          <a:prstGeom prst="line">
-            <a:avLst/>
-          </a:prstGeom>
-          <a:noFill/>
-          <a:ln w="9525">
-            <a:solidFill>
-              <a:srgbClr val="E1E7EE"/>
-            </a:solidFill>
-            <a:prstDash val="solid"/>
-          </a:ln>
-        </p:spPr>
-        <p:txBody>
-          <a:bodyPr/>
-          <a:p/>
-        </p:txBody>
-      </p:sp>
-      <p:sp>
-        <p:nvSpPr>
-          <p:cNvPr id="22" name="Shape 19"/>
-          <p:cNvSpPr/>
-          <p:nvPr/>
-        </p:nvSpPr>
-        <p:spPr>
-          <a:xfrm>
-            <a:off x="6720840" y="3191256"/>
-            <a:ext cx="4754880" cy="475488"/>
-          </a:xfrm>
-          <a:prstGeom prst="rect">
-            <a:avLst/>
-          </a:prstGeom>
-          <a:solidFill>
-            <a:srgbClr val="FFFFFF"/>
-          </a:solidFill>
-          <a:ln/>
-        </p:spPr>
-        <p:txBody>
-          <a:bodyPr/>
-          <a:p/>
-        </p:txBody>
-      </p:sp>
-      <p:sp>
-        <p:nvSpPr>
-          <p:cNvPr id="23" name="Text 20"/>
-          <p:cNvSpPr txBox="1"/>
-          <p:nvPr/>
-        </p:nvSpPr>
-        <p:spPr>
-          <a:xfrm>
-            <a:off x="6775704" y="3191256"/>
-            <a:ext cx="393192" cy="475488"/>
-          </a:xfrm>
-          <a:prstGeom prst="rect">
-            <a:avLst/>
-          </a:prstGeom>
-          <a:noFill/>
-          <a:ln/>
-        </p:spPr>
-        <p:txBody>
-          <a:bodyPr wrap="square" lIns="0" tIns="0" rIns="0" bIns="0" rtlCol="0" anchor="ctr"/>
-          <a:lstStyle/>
-          <a:p>
-            <a:pPr algn="ctr" indent="0" marL="0">
-              <a:buNone/>
-            </a:pPr>
-            <a:r>
-              <a:rPr lang="en-US" sz="1050" b="1" dirty="0">
-                <a:solidFill>
-                  <a:srgbClr val="44536B"/>
-                </a:solidFill>
-                <a:latin typeface="Calibri" pitchFamily="34" charset="0"/>
-                <a:ea typeface="Calibri" pitchFamily="34" charset="-122"/>
-                <a:cs typeface="Calibri" pitchFamily="34" charset="-120"/>
-              </a:rPr>
-              <a:t>2</a:t>
-            </a:r>
-            <a:endParaRPr lang="en-US" sz="1050" dirty="0"/>
-          </a:p>
-        </p:txBody>
-      </p:sp>
-      <p:sp>
-        <p:nvSpPr>
-          <p:cNvPr id="24" name="Text 21"/>
-          <p:cNvSpPr txBox="1"/>
-          <p:nvPr/>
-        </p:nvSpPr>
-        <p:spPr>
-          <a:xfrm>
-            <a:off x="7278624" y="3191256"/>
-            <a:ext cx="941832" cy="475488"/>
-          </a:xfrm>
-          <a:prstGeom prst="rect">
-            <a:avLst/>
-          </a:prstGeom>
-          <a:noFill/>
-          <a:ln/>
-        </p:spPr>
-        <p:txBody>
-          <a:bodyPr wrap="square" lIns="0" tIns="0" rIns="0" bIns="0" rtlCol="0" anchor="ctr"/>
-          <a:lstStyle/>
-          <a:p>
-            <a:pPr algn="ctr" indent="0" marL="0">
-              <a:buNone/>
-            </a:pPr>
-            <a:r>
-              <a:rPr lang="en-US" sz="1050" dirty="0">
-                <a:solidFill>
-                  <a:srgbClr val="44536B"/>
-                </a:solidFill>
-                <a:latin typeface="Calibri" pitchFamily="34" charset="0"/>
-                <a:ea typeface="Calibri" pitchFamily="34" charset="-122"/>
-                <a:cs typeface="Calibri" pitchFamily="34" charset="-120"/>
-              </a:rPr>
-              <a:t>100-002</a:t>
-            </a:r>
-            <a:endParaRPr lang="en-US" sz="1050" dirty="0"/>
-          </a:p>
-        </p:txBody>
-      </p:sp>
-      <p:sp>
-        <p:nvSpPr>
-          <p:cNvPr id="25" name="Text 22"/>
-          <p:cNvSpPr txBox="1"/>
-          <p:nvPr/>
-        </p:nvSpPr>
-        <p:spPr>
-          <a:xfrm>
-            <a:off x="8330184" y="3191256"/>
-            <a:ext cx="2587752" cy="475488"/>
-          </a:xfrm>
-          <a:prstGeom prst="rect">
-            <a:avLst/>
-          </a:prstGeom>
-          <a:noFill/>
-          <a:ln/>
-        </p:spPr>
-        <p:txBody>
-          <a:bodyPr wrap="square" lIns="0" tIns="0" rIns="0" bIns="0" rtlCol="0" anchor="ctr"/>
-          <a:lstStyle/>
-          <a:p>
-            <a:pPr algn="l" indent="0" marL="0">
-              <a:buNone/>
-            </a:pPr>
-            <a:r>
-              <a:rPr lang="en-US" sz="1050" dirty="0">
-                <a:solidFill>
-                  <a:srgbClr val="0F2942"/>
-                </a:solidFill>
-                <a:latin typeface="Calibri" pitchFamily="34" charset="0"/>
-                <a:ea typeface="Calibri" pitchFamily="34" charset="-122"/>
-                <a:cs typeface="Calibri" pitchFamily="34" charset="-120"/>
-              </a:rPr>
-              <a:t>Cover plate</a:t>
-            </a:r>
-            <a:endParaRPr lang="en-US" sz="1050" dirty="0"/>
-          </a:p>
-        </p:txBody>
-      </p:sp>
-      <p:sp>
-        <p:nvSpPr>
-          <p:cNvPr id="26" name="Text 23"/>
-          <p:cNvSpPr txBox="1"/>
-          <p:nvPr/>
-        </p:nvSpPr>
-        <p:spPr>
-          <a:xfrm>
-            <a:off x="11027664" y="3191256"/>
-            <a:ext cx="393192" cy="475488"/>
-          </a:xfrm>
-          <a:prstGeom prst="rect">
-            <a:avLst/>
-          </a:prstGeom>
-          <a:noFill/>
-          <a:ln/>
-        </p:spPr>
-        <p:txBody>
-          <a:bodyPr wrap="square" lIns="0" tIns="0" rIns="0" bIns="0" rtlCol="0" anchor="ctr"/>
-          <a:lstStyle/>
-          <a:p>
-            <a:pPr algn="ctr" indent="0" marL="0">
-              <a:buNone/>
-            </a:pPr>
-            <a:r>
-              <a:rPr lang="en-US" sz="1050" dirty="0">
-                <a:solidFill>
-                  <a:srgbClr val="44536B"/>
-                </a:solidFill>
-                <a:latin typeface="Calibri" pitchFamily="34" charset="0"/>
-                <a:ea typeface="Calibri" pitchFamily="34" charset="-122"/>
-                <a:cs typeface="Calibri" pitchFamily="34" charset="-120"/>
-              </a:rPr>
-              <a:t>1</a:t>
-            </a:r>
-            <a:endParaRPr lang="en-US" sz="1050" dirty="0"/>
-          </a:p>
-        </p:txBody>
-      </p:sp>
-      <p:sp>
-        <p:nvSpPr>
-          <p:cNvPr id="27" name="Shape 24"/>
-          <p:cNvSpPr/>
-          <p:nvPr/>
-        </p:nvSpPr>
-        <p:spPr>
-          <a:xfrm>
-            <a:off x="6720840" y="3666744"/>
-            <a:ext cx="4754880" cy="0"/>
-          </a:xfrm>
-          <a:prstGeom prst="line">
-            <a:avLst/>
-          </a:prstGeom>
-          <a:noFill/>
-          <a:ln w="9525">
-            <a:solidFill>
-              <a:srgbClr val="E1E7EE"/>
-            </a:solidFill>
-            <a:prstDash val="solid"/>
-          </a:ln>
-        </p:spPr>
-        <p:txBody>
-          <a:bodyPr/>
-          <a:p/>
-        </p:txBody>
-      </p:sp>
-      <p:sp>
-        <p:nvSpPr>
-          <p:cNvPr id="28" name="Text 25"/>
-          <p:cNvSpPr txBox="1"/>
-          <p:nvPr/>
-        </p:nvSpPr>
-        <p:spPr>
-          <a:xfrm>
-            <a:off x="6775704" y="3666744"/>
-            <a:ext cx="393192" cy="475488"/>
-          </a:xfrm>
-          <a:prstGeom prst="rect">
-            <a:avLst/>
-          </a:prstGeom>
-          <a:noFill/>
-          <a:ln/>
-        </p:spPr>
-        <p:txBody>
-          <a:bodyPr wrap="square" lIns="0" tIns="0" rIns="0" bIns="0" rtlCol="0" anchor="ctr"/>
-          <a:lstStyle/>
-          <a:p>
-            <a:pPr algn="ctr" indent="0" marL="0">
-              <a:buNone/>
-            </a:pPr>
-            <a:r>
-              <a:rPr lang="en-US" sz="1050" b="1" dirty="0">
-                <a:solidFill>
-                  <a:srgbClr val="44536B"/>
-                </a:solidFill>
-                <a:latin typeface="Calibri" pitchFamily="34" charset="0"/>
-                <a:ea typeface="Calibri" pitchFamily="34" charset="-122"/>
-                <a:cs typeface="Calibri" pitchFamily="34" charset="-120"/>
-              </a:rPr>
-              <a:t>3</a:t>
-            </a:r>
-            <a:endParaRPr lang="en-US" sz="1050" dirty="0"/>
-          </a:p>
-        </p:txBody>
-      </p:sp>
-      <p:sp>
-        <p:nvSpPr>
-          <p:cNvPr id="29" name="Text 26"/>
-          <p:cNvSpPr txBox="1"/>
-          <p:nvPr/>
-        </p:nvSpPr>
-        <p:spPr>
-          <a:xfrm>
-            <a:off x="7278624" y="3666744"/>
-            <a:ext cx="941832" cy="475488"/>
-          </a:xfrm>
-          <a:prstGeom prst="rect">
-            <a:avLst/>
-          </a:prstGeom>
-          <a:noFill/>
-          <a:ln/>
-        </p:spPr>
-        <p:txBody>
-          <a:bodyPr wrap="square" lIns="0" tIns="0" rIns="0" bIns="0" rtlCol="0" anchor="ctr"/>
-          <a:lstStyle/>
-          <a:p>
-            <a:pPr algn="ctr" indent="0" marL="0">
-              <a:buNone/>
-            </a:pPr>
-            <a:r>
-              <a:rPr lang="en-US" sz="1050" dirty="0">
-                <a:solidFill>
-                  <a:srgbClr val="44536B"/>
-                </a:solidFill>
-                <a:latin typeface="Calibri" pitchFamily="34" charset="0"/>
-                <a:ea typeface="Calibri" pitchFamily="34" charset="-122"/>
-                <a:cs typeface="Calibri" pitchFamily="34" charset="-120"/>
-              </a:rPr>
-              <a:t>100-003</a:t>
-            </a:r>
-            <a:endParaRPr lang="en-US" sz="1050" dirty="0"/>
-          </a:p>
-        </p:txBody>
-      </p:sp>
-      <p:sp>
-        <p:nvSpPr>
-          <p:cNvPr id="30" name="Text 27"/>
-          <p:cNvSpPr txBox="1"/>
-          <p:nvPr/>
-        </p:nvSpPr>
-        <p:spPr>
-          <a:xfrm>
-            <a:off x="8330184" y="3666744"/>
-            <a:ext cx="2587752" cy="475488"/>
-          </a:xfrm>
-          <a:prstGeom prst="rect">
-            <a:avLst/>
-          </a:prstGeom>
-          <a:noFill/>
-          <a:ln/>
-        </p:spPr>
-        <p:txBody>
-          <a:bodyPr wrap="square" lIns="0" tIns="0" rIns="0" bIns="0" rtlCol="0" anchor="ctr"/>
-          <a:lstStyle/>
-          <a:p>
-            <a:pPr algn="l" indent="0" marL="0">
-              <a:buNone/>
-            </a:pPr>
-            <a:r>
-              <a:rPr lang="en-US" sz="1050" dirty="0">
-                <a:solidFill>
-                  <a:srgbClr val="0F2942"/>
-                </a:solidFill>
-                <a:latin typeface="Calibri" pitchFamily="34" charset="0"/>
-                <a:ea typeface="Calibri" pitchFamily="34" charset="-122"/>
-                <a:cs typeface="Calibri" pitchFamily="34" charset="-120"/>
-              </a:rPr>
-              <a:t>Gasket, silicone</a:t>
-            </a:r>
-            <a:endParaRPr lang="en-US" sz="1050" dirty="0"/>
-          </a:p>
-        </p:txBody>
-      </p:sp>
-      <p:sp>
-        <p:nvSpPr>
-          <p:cNvPr id="31" name="Text 28"/>
-          <p:cNvSpPr txBox="1"/>
-          <p:nvPr/>
-        </p:nvSpPr>
-        <p:spPr>
-          <a:xfrm>
-            <a:off x="11027664" y="3666744"/>
-            <a:ext cx="393192" cy="475488"/>
-          </a:xfrm>
-          <a:prstGeom prst="rect">
-            <a:avLst/>
-          </a:prstGeom>
-          <a:noFill/>
-          <a:ln/>
-        </p:spPr>
-        <p:txBody>
-          <a:bodyPr wrap="square" lIns="0" tIns="0" rIns="0" bIns="0" rtlCol="0" anchor="ctr"/>
-          <a:lstStyle/>
-          <a:p>
-            <a:pPr algn="ctr" indent="0" marL="0">
-              <a:buNone/>
-            </a:pPr>
-            <a:r>
-              <a:rPr lang="en-US" sz="1050" dirty="0">
-                <a:solidFill>
-                  <a:srgbClr val="44536B"/>
-                </a:solidFill>
-                <a:latin typeface="Calibri" pitchFamily="34" charset="0"/>
-                <a:ea typeface="Calibri" pitchFamily="34" charset="-122"/>
-                <a:cs typeface="Calibri" pitchFamily="34" charset="-120"/>
-              </a:rPr>
-              <a:t>1</a:t>
-            </a:r>
-            <a:endParaRPr lang="en-US" sz="1050" dirty="0"/>
-          </a:p>
-        </p:txBody>
-      </p:sp>
-      <p:sp>
-        <p:nvSpPr>
-          <p:cNvPr id="32" name="Shape 29"/>
-          <p:cNvSpPr/>
-          <p:nvPr/>
-        </p:nvSpPr>
-        <p:spPr>
-          <a:xfrm>
-            <a:off x="6720840" y="4142232"/>
-            <a:ext cx="4754880" cy="0"/>
-          </a:xfrm>
-          <a:prstGeom prst="line">
-            <a:avLst/>
-          </a:prstGeom>
-          <a:noFill/>
-          <a:ln w="9525">
-            <a:solidFill>
-              <a:srgbClr val="E1E7EE"/>
-            </a:solidFill>
-            <a:prstDash val="solid"/>
-          </a:ln>
-        </p:spPr>
-        <p:txBody>
-          <a:bodyPr/>
-          <a:p/>
-        </p:txBody>
-      </p:sp>
-      <p:sp>
-        <p:nvSpPr>
-          <p:cNvPr id="33" name="Shape 30"/>
-          <p:cNvSpPr/>
-          <p:nvPr/>
-        </p:nvSpPr>
-        <p:spPr>
-          <a:xfrm>
-            <a:off x="6720840" y="4142232"/>
-            <a:ext cx="4754880" cy="475488"/>
-          </a:xfrm>
-          <a:prstGeom prst="rect">
-            <a:avLst/>
-          </a:prstGeom>
-          <a:solidFill>
-            <a:srgbClr val="FFFFFF"/>
-          </a:solidFill>
-          <a:ln/>
-        </p:spPr>
-        <p:txBody>
-          <a:bodyPr/>
-          <a:p/>
-        </p:txBody>
-      </p:sp>
-      <p:sp>
-        <p:nvSpPr>
-          <p:cNvPr id="34" name="Text 31"/>
-          <p:cNvSpPr txBox="1"/>
-          <p:nvPr/>
-        </p:nvSpPr>
-        <p:spPr>
-          <a:xfrm>
-            <a:off x="6775704" y="4142232"/>
-            <a:ext cx="393192" cy="475488"/>
-          </a:xfrm>
-          <a:prstGeom prst="rect">
-            <a:avLst/>
-          </a:prstGeom>
-          <a:noFill/>
-          <a:ln/>
-        </p:spPr>
-        <p:txBody>
-          <a:bodyPr wrap="square" lIns="0" tIns="0" rIns="0" bIns="0" rtlCol="0" anchor="ctr"/>
-          <a:lstStyle/>
-          <a:p>
-            <a:pPr algn="ctr" indent="0" marL="0">
-              <a:buNone/>
-            </a:pPr>
-            <a:r>
-              <a:rPr lang="en-US" sz="1050" b="1" dirty="0">
-                <a:solidFill>
-                  <a:srgbClr val="44536B"/>
-                </a:solidFill>
-                <a:latin typeface="Calibri" pitchFamily="34" charset="0"/>
-                <a:ea typeface="Calibri" pitchFamily="34" charset="-122"/>
-                <a:cs typeface="Calibri" pitchFamily="34" charset="-120"/>
-              </a:rPr>
-              <a:t>4</a:t>
-            </a:r>
-            <a:endParaRPr lang="en-US" sz="1050" dirty="0"/>
-          </a:p>
-        </p:txBody>
-      </p:sp>
-      <p:sp>
-        <p:nvSpPr>
-          <p:cNvPr id="35" name="Text 32"/>
-          <p:cNvSpPr txBox="1"/>
-          <p:nvPr/>
-        </p:nvSpPr>
-        <p:spPr>
-          <a:xfrm>
-            <a:off x="7278624" y="4142232"/>
-            <a:ext cx="941832" cy="475488"/>
-          </a:xfrm>
-          <a:prstGeom prst="rect">
-            <a:avLst/>
-          </a:prstGeom>
-          <a:noFill/>
-          <a:ln/>
-        </p:spPr>
-        <p:txBody>
-          <a:bodyPr wrap="square" lIns="0" tIns="0" rIns="0" bIns="0" rtlCol="0" anchor="ctr"/>
-          <a:lstStyle/>
-          <a:p>
-            <a:pPr algn="ctr" indent="0" marL="0">
-              <a:buNone/>
-            </a:pPr>
-            <a:r>
-              <a:rPr lang="en-US" sz="1050" dirty="0">
-                <a:solidFill>
-                  <a:srgbClr val="44536B"/>
-                </a:solidFill>
-                <a:latin typeface="Calibri" pitchFamily="34" charset="0"/>
-                <a:ea typeface="Calibri" pitchFamily="34" charset="-122"/>
-                <a:cs typeface="Calibri" pitchFamily="34" charset="-120"/>
-              </a:rPr>
-              <a:t>100-001</a:t>
-            </a:r>
-            <a:endParaRPr lang="en-US" sz="1050" dirty="0"/>
-          </a:p>
-        </p:txBody>
-      </p:sp>
-      <p:sp>
-        <p:nvSpPr>
-          <p:cNvPr id="36" name="Text 33"/>
-          <p:cNvSpPr txBox="1"/>
-          <p:nvPr/>
-        </p:nvSpPr>
-        <p:spPr>
-          <a:xfrm>
-            <a:off x="8330184" y="4142232"/>
-            <a:ext cx="2587752" cy="475488"/>
-          </a:xfrm>
-          <a:prstGeom prst="rect">
-            <a:avLst/>
-          </a:prstGeom>
-          <a:noFill/>
-          <a:ln/>
-        </p:spPr>
-        <p:txBody>
-          <a:bodyPr wrap="square" lIns="0" tIns="0" rIns="0" bIns="0" rtlCol="0" anchor="ctr"/>
-          <a:lstStyle/>
-          <a:p>
-            <a:pPr algn="l" indent="0" marL="0">
-              <a:buNone/>
-            </a:pPr>
-            <a:r>
-              <a:rPr lang="en-US" sz="1050" dirty="0">
-                <a:solidFill>
-                  <a:srgbClr val="0F2942"/>
-                </a:solidFill>
-                <a:latin typeface="Calibri" pitchFamily="34" charset="0"/>
-                <a:ea typeface="Calibri" pitchFamily="34" charset="-122"/>
-                <a:cs typeface="Calibri" pitchFamily="34" charset="-120"/>
-              </a:rPr>
-              <a:t>Housing (base)</a:t>
-            </a:r>
-            <a:endParaRPr lang="en-US" sz="1050" dirty="0"/>
-          </a:p>
-        </p:txBody>
-      </p:sp>
-      <p:sp>
-        <p:nvSpPr>
-          <p:cNvPr id="37" name="Text 34"/>
-          <p:cNvSpPr txBox="1"/>
-          <p:nvPr/>
-        </p:nvSpPr>
-        <p:spPr>
-          <a:xfrm>
-            <a:off x="11027664" y="4142232"/>
-            <a:ext cx="393192" cy="475488"/>
-          </a:xfrm>
-          <a:prstGeom prst="rect">
-            <a:avLst/>
-          </a:prstGeom>
-          <a:noFill/>
-          <a:ln/>
-        </p:spPr>
-        <p:txBody>
-          <a:bodyPr wrap="square" lIns="0" tIns="0" rIns="0" bIns="0" rtlCol="0" anchor="ctr"/>
-          <a:lstStyle/>
-          <a:p>
-            <a:pPr algn="ctr" indent="0" marL="0">
-              <a:buNone/>
-            </a:pPr>
-            <a:r>
-              <a:rPr lang="en-US" sz="1050" dirty="0">
-                <a:solidFill>
-                  <a:srgbClr val="44536B"/>
-                </a:solidFill>
-                <a:latin typeface="Calibri" pitchFamily="34" charset="0"/>
-                <a:ea typeface="Calibri" pitchFamily="34" charset="-122"/>
-                <a:cs typeface="Calibri" pitchFamily="34" charset="-120"/>
-              </a:rPr>
-              <a:t>1</a:t>
-            </a:r>
-            <a:endParaRPr lang="en-US" sz="1050" dirty="0"/>
-          </a:p>
-        </p:txBody>
-      </p:sp>
-      <p:sp>
-        <p:nvSpPr>
-          <p:cNvPr id="38" name="Shape 35"/>
-          <p:cNvSpPr/>
-          <p:nvPr/>
-        </p:nvSpPr>
-        <p:spPr>
-          <a:xfrm>
-            <a:off x="6720840" y="4617720"/>
-            <a:ext cx="4754880" cy="0"/>
-          </a:xfrm>
-          <a:prstGeom prst="line">
-            <a:avLst/>
-          </a:prstGeom>
-          <a:noFill/>
-          <a:ln w="9525">
-            <a:solidFill>
-              <a:srgbClr val="E1E7EE"/>
-            </a:solidFill>
-            <a:prstDash val="solid"/>
-          </a:ln>
-        </p:spPr>
-        <p:txBody>
-          <a:bodyPr/>
-          <a:p/>
-        </p:txBody>
-      </p:sp>
-      <p:sp>
-        <p:nvSpPr>
-          <p:cNvPr id="39" name="Shape 36"/>
-          <p:cNvSpPr/>
-          <p:nvPr/>
-        </p:nvSpPr>
-        <p:spPr>
-          <a:xfrm>
-            <a:off x="6720840" y="2423160"/>
-            <a:ext cx="4754880" cy="2194560"/>
-          </a:xfrm>
-          <a:prstGeom prst="rect">
-            <a:avLst/>
-          </a:prstGeom>
-          <a:ln w="12700">
-            <a:solidFill>
-              <a:srgbClr val="0F2942"/>
-            </a:solidFill>
-            <a:prstDash val="solid"/>
-          </a:ln>
-        </p:spPr>
-        <p:txBody>
-          <a:bodyPr/>
-          <a:p/>
-        </p:txBody>
-      </p:sp>
-      <p:sp>
-        <p:nvSpPr>
-          <p:cNvPr id="40" name="Text 37"/>
-          <p:cNvSpPr txBox="1"/>
-          <p:nvPr/>
-        </p:nvSpPr>
-        <p:spPr>
-          <a:xfrm>
-            <a:off x="6720840" y="4846320"/>
-            <a:ext cx="4754880" cy="1234440"/>
-          </a:xfrm>
-          <a:prstGeom prst="rect">
-            <a:avLst/>
-          </a:prstGeom>
-          <a:noFill/>
-          <a:ln/>
-        </p:spPr>
-        <p:txBody>
-          <a:bodyPr wrap="square" lIns="0" tIns="0" rIns="0" bIns="0" rtlCol="0" anchor="t"/>
-          <a:lstStyle/>
-          <a:p>
-            <a:pPr indent="0" marL="0">
-              <a:lnSpc>
-                <a:spcPct val="115000"/>
-              </a:lnSpc>
-              <a:buNone/>
-            </a:pPr>
-            <a:r>
-              <a:rPr lang="en-US" sz="1050" dirty="0">
-                <a:solidFill>
-                  <a:srgbClr val="44536B"/>
-                </a:solidFill>
-                <a:latin typeface="Calibri" pitchFamily="34" charset="0"/>
-                <a:ea typeface="Calibri" pitchFamily="34" charset="-122"/>
-                <a:cs typeface="Calibri" pitchFamily="34" charset="-120"/>
-              </a:rPr>
-              <a:t>In CAD, this table is generated directly from the assembly and stays linked — edit the model and the parts list updates automatically.</a:t>
-            </a:r>
-            <a:endParaRPr lang="en-US" sz="1050" dirty="0"/>
-          </a:p>
-        </p:txBody>
-      </p:sp>
-    </p:spTree>
-  </p:cSld>
-  <p:clrMapOvr>
-    <a:masterClrMapping/>
-  </p:clrMapOvr>
-</p:sld>
-</file>
-
-<file path=ppt/slides/slide38.xml><?xml version="1.0" encoding="utf-8"?>
-<p:sld xmlns:a="http://schemas.openxmlformats.org/drawingml/2006/main" xmlns:r="http://schemas.openxmlformats.org/officeDocument/2006/relationships" xmlns:p="http://schemas.openxmlformats.org/presentationml/2006/main">
   <p:cSld name="Slide 42">
     <p:bg>
       <p:bgPr>
@@ -31865,7 +30367,7 @@
 </p:sld>
 </file>
 
-<file path=ppt/slides/slide39.xml><?xml version="1.0" encoding="utf-8"?>
+<file path=ppt/slides/slide38.xml><?xml version="1.0" encoding="utf-8"?>
 <p:sld xmlns:a="http://schemas.openxmlformats.org/drawingml/2006/main" xmlns:r="http://schemas.openxmlformats.org/officeDocument/2006/relationships" xmlns:p="http://schemas.openxmlformats.org/presentationml/2006/main">
   <p:cSld name="Slide 43">
     <p:bg>
@@ -32159,7 +30661,7 @@
                 <a:ea typeface="Calibri" pitchFamily="34" charset="-122"/>
                 <a:cs typeface="Calibri" pitchFamily="34" charset="-120"/>
               </a:rPr>
-              <a:t>Multi-part assembly</a:t>
+              <a:t>Thread &amp; fastener notes</a:t>
             </a:r>
             <a:endParaRPr lang="en-US" sz="1400" dirty="0"/>
           </a:p>
@@ -32201,7 +30703,7 @@
                 <a:ea typeface="Calibri" pitchFamily="34" charset="-122"/>
                 <a:cs typeface="Calibri" pitchFamily="34" charset="-120"/>
               </a:rPr>
-              <a:t>correct mates, sub-assemblies, and library hardware</a:t>
+              <a:t>correct callouts, class of fit, and hole sizing</a:t>
             </a:r>
             <a:endParaRPr lang="en-US" sz="1250" dirty="0"/>
           </a:p>
@@ -32334,7 +30836,7 @@
                 <a:ea typeface="Calibri" pitchFamily="34" charset="-122"/>
                 <a:cs typeface="Calibri" pitchFamily="34" charset="-120"/>
               </a:rPr>
-              <a:t>Exploded drawing + BOM</a:t>
+              <a:t>Multi-part assembly</a:t>
             </a:r>
             <a:endParaRPr lang="en-US" sz="1400" dirty="0"/>
           </a:p>
@@ -32376,7 +30878,7 @@
                 <a:ea typeface="Calibri" pitchFamily="34" charset="-122"/>
                 <a:cs typeface="Calibri" pitchFamily="34" charset="-120"/>
               </a:rPr>
-              <a:t>balloons keyed to a linked bill of materials</a:t>
+              <a:t>correct mates, sub-assemblies, and library hardware</a:t>
             </a:r>
             <a:endParaRPr lang="en-US" sz="1250" dirty="0"/>
           </a:p>
@@ -32704,7 +31206,7 @@
                 <a:ea typeface="Calibri" pitchFamily="34" charset="-122"/>
                 <a:cs typeface="Calibri" pitchFamily="34" charset="-120"/>
               </a:rPr>
-              <a:t>correctly called-out thread and fastener notes, a multi-part assembly model with correct mates, an exploded drawing with balloons and a linked BOM, plus a documented design revision.   </a:t>
+              <a:t>correctly called-out thread and fastener notes, a multi-part assembly model with correct mates, plus a documented design revision.   </a:t>
             </a:r>
             <a:endParaRPr lang="en-US" sz="1200" dirty="0"/>
           </a:p>
@@ -32741,9 +31243,971 @@
                 <a:ea typeface="Calibri" pitchFamily="34" charset="-122"/>
                 <a:cs typeface="Calibri" pitchFamily="34" charset="-120"/>
               </a:rPr>
-              <a:t>Unit 2 Quiz (Week 11) and the corresponding portfolio modules.</a:t>
+              <a:t>Unit 2 Competency Check (Week 11) and the corresponding portfolio modules.</a:t>
             </a:r>
             <a:endParaRPr lang="en-US" sz="1200" dirty="0"/>
+          </a:p>
+        </p:txBody>
+      </p:sp>
+    </p:spTree>
+  </p:cSld>
+  <p:clrMapOvr>
+    <a:masterClrMapping/>
+  </p:clrMapOvr>
+</p:sld>
+</file>
+
+<file path=ppt/slides/slide39.xml><?xml version="1.0" encoding="utf-8"?>
+<p:sld xmlns:a="http://schemas.openxmlformats.org/drawingml/2006/main" xmlns:r="http://schemas.openxmlformats.org/officeDocument/2006/relationships" xmlns:p="http://schemas.openxmlformats.org/presentationml/2006/main">
+  <p:cSld name="Slide 44">
+    <p:bg>
+      <p:bgPr>
+        <a:solidFill>
+          <a:srgbClr val="0F2942"/>
+        </a:solidFill>
+      </p:bgPr>
+    </p:bg>
+    <p:spTree>
+      <p:nvGrpSpPr>
+        <p:cNvPr id="1" name=""/>
+        <p:cNvGrpSpPr/>
+        <p:nvPr/>
+      </p:nvGrpSpPr>
+      <p:grpSpPr>
+        <a:xfrm>
+          <a:off x="0" y="0"/>
+          <a:ext cx="0" cy="0"/>
+          <a:chOff x="0" y="0"/>
+          <a:chExt cx="0" cy="0"/>
+        </a:xfrm>
+      </p:grpSpPr>
+      <p:sp>
+        <p:nvSpPr>
+          <p:cNvPr id="2" name="Shape 0"/>
+          <p:cNvSpPr/>
+          <p:nvPr/>
+        </p:nvSpPr>
+        <p:spPr>
+          <a:xfrm>
+            <a:off x="758952" y="0"/>
+            <a:ext cx="0" cy="6858000"/>
+          </a:xfrm>
+          <a:prstGeom prst="line">
+            <a:avLst/>
+          </a:prstGeom>
+          <a:noFill/>
+          <a:ln w="6350">
+            <a:solidFill>
+              <a:srgbClr val="16324F"/>
+            </a:solidFill>
+            <a:prstDash val="solid"/>
+          </a:ln>
+        </p:spPr>
+        <p:txBody>
+          <a:bodyPr/>
+          <a:p/>
+        </p:txBody>
+      </p:sp>
+      <p:sp>
+        <p:nvSpPr>
+          <p:cNvPr id="3" name="Shape 1"/>
+          <p:cNvSpPr/>
+          <p:nvPr/>
+        </p:nvSpPr>
+        <p:spPr>
+          <a:xfrm>
+            <a:off x="1517904" y="0"/>
+            <a:ext cx="0" cy="6858000"/>
+          </a:xfrm>
+          <a:prstGeom prst="line">
+            <a:avLst/>
+          </a:prstGeom>
+          <a:noFill/>
+          <a:ln w="6350">
+            <a:solidFill>
+              <a:srgbClr val="16324F"/>
+            </a:solidFill>
+            <a:prstDash val="solid"/>
+          </a:ln>
+        </p:spPr>
+        <p:txBody>
+          <a:bodyPr/>
+          <a:p/>
+        </p:txBody>
+      </p:sp>
+      <p:sp>
+        <p:nvSpPr>
+          <p:cNvPr id="4" name="Shape 2"/>
+          <p:cNvSpPr/>
+          <p:nvPr/>
+        </p:nvSpPr>
+        <p:spPr>
+          <a:xfrm>
+            <a:off x="2276856" y="0"/>
+            <a:ext cx="0" cy="6858000"/>
+          </a:xfrm>
+          <a:prstGeom prst="line">
+            <a:avLst/>
+          </a:prstGeom>
+          <a:noFill/>
+          <a:ln w="6350">
+            <a:solidFill>
+              <a:srgbClr val="16324F"/>
+            </a:solidFill>
+            <a:prstDash val="solid"/>
+          </a:ln>
+        </p:spPr>
+        <p:txBody>
+          <a:bodyPr/>
+          <a:p/>
+        </p:txBody>
+      </p:sp>
+      <p:sp>
+        <p:nvSpPr>
+          <p:cNvPr id="5" name="Shape 3"/>
+          <p:cNvSpPr/>
+          <p:nvPr/>
+        </p:nvSpPr>
+        <p:spPr>
+          <a:xfrm>
+            <a:off x="3035808" y="0"/>
+            <a:ext cx="0" cy="6858000"/>
+          </a:xfrm>
+          <a:prstGeom prst="line">
+            <a:avLst/>
+          </a:prstGeom>
+          <a:noFill/>
+          <a:ln w="6350">
+            <a:solidFill>
+              <a:srgbClr val="16324F"/>
+            </a:solidFill>
+            <a:prstDash val="solid"/>
+          </a:ln>
+        </p:spPr>
+        <p:txBody>
+          <a:bodyPr/>
+          <a:p/>
+        </p:txBody>
+      </p:sp>
+      <p:sp>
+        <p:nvSpPr>
+          <p:cNvPr id="6" name="Shape 4"/>
+          <p:cNvSpPr/>
+          <p:nvPr/>
+        </p:nvSpPr>
+        <p:spPr>
+          <a:xfrm>
+            <a:off x="3794760" y="0"/>
+            <a:ext cx="0" cy="6858000"/>
+          </a:xfrm>
+          <a:prstGeom prst="line">
+            <a:avLst/>
+          </a:prstGeom>
+          <a:noFill/>
+          <a:ln w="6350">
+            <a:solidFill>
+              <a:srgbClr val="16324F"/>
+            </a:solidFill>
+            <a:prstDash val="solid"/>
+          </a:ln>
+        </p:spPr>
+        <p:txBody>
+          <a:bodyPr/>
+          <a:p/>
+        </p:txBody>
+      </p:sp>
+      <p:sp>
+        <p:nvSpPr>
+          <p:cNvPr id="7" name="Shape 5"/>
+          <p:cNvSpPr/>
+          <p:nvPr/>
+        </p:nvSpPr>
+        <p:spPr>
+          <a:xfrm>
+            <a:off x="4553712" y="0"/>
+            <a:ext cx="0" cy="6858000"/>
+          </a:xfrm>
+          <a:prstGeom prst="line">
+            <a:avLst/>
+          </a:prstGeom>
+          <a:noFill/>
+          <a:ln w="6350">
+            <a:solidFill>
+              <a:srgbClr val="16324F"/>
+            </a:solidFill>
+            <a:prstDash val="solid"/>
+          </a:ln>
+        </p:spPr>
+        <p:txBody>
+          <a:bodyPr/>
+          <a:p/>
+        </p:txBody>
+      </p:sp>
+      <p:sp>
+        <p:nvSpPr>
+          <p:cNvPr id="8" name="Shape 6"/>
+          <p:cNvSpPr/>
+          <p:nvPr/>
+        </p:nvSpPr>
+        <p:spPr>
+          <a:xfrm>
+            <a:off x="5312664" y="0"/>
+            <a:ext cx="0" cy="6858000"/>
+          </a:xfrm>
+          <a:prstGeom prst="line">
+            <a:avLst/>
+          </a:prstGeom>
+          <a:noFill/>
+          <a:ln w="6350">
+            <a:solidFill>
+              <a:srgbClr val="16324F"/>
+            </a:solidFill>
+            <a:prstDash val="solid"/>
+          </a:ln>
+        </p:spPr>
+        <p:txBody>
+          <a:bodyPr/>
+          <a:p/>
+        </p:txBody>
+      </p:sp>
+      <p:sp>
+        <p:nvSpPr>
+          <p:cNvPr id="9" name="Shape 7"/>
+          <p:cNvSpPr/>
+          <p:nvPr/>
+        </p:nvSpPr>
+        <p:spPr>
+          <a:xfrm>
+            <a:off x="6071616" y="0"/>
+            <a:ext cx="0" cy="6858000"/>
+          </a:xfrm>
+          <a:prstGeom prst="line">
+            <a:avLst/>
+          </a:prstGeom>
+          <a:noFill/>
+          <a:ln w="6350">
+            <a:solidFill>
+              <a:srgbClr val="16324F"/>
+            </a:solidFill>
+            <a:prstDash val="solid"/>
+          </a:ln>
+        </p:spPr>
+        <p:txBody>
+          <a:bodyPr/>
+          <a:p/>
+        </p:txBody>
+      </p:sp>
+      <p:sp>
+        <p:nvSpPr>
+          <p:cNvPr id="10" name="Shape 8"/>
+          <p:cNvSpPr/>
+          <p:nvPr/>
+        </p:nvSpPr>
+        <p:spPr>
+          <a:xfrm>
+            <a:off x="6830568" y="0"/>
+            <a:ext cx="0" cy="6858000"/>
+          </a:xfrm>
+          <a:prstGeom prst="line">
+            <a:avLst/>
+          </a:prstGeom>
+          <a:noFill/>
+          <a:ln w="6350">
+            <a:solidFill>
+              <a:srgbClr val="16324F"/>
+            </a:solidFill>
+            <a:prstDash val="solid"/>
+          </a:ln>
+        </p:spPr>
+        <p:txBody>
+          <a:bodyPr/>
+          <a:p/>
+        </p:txBody>
+      </p:sp>
+      <p:sp>
+        <p:nvSpPr>
+          <p:cNvPr id="11" name="Shape 9"/>
+          <p:cNvSpPr/>
+          <p:nvPr/>
+        </p:nvSpPr>
+        <p:spPr>
+          <a:xfrm>
+            <a:off x="7589520" y="0"/>
+            <a:ext cx="0" cy="6858000"/>
+          </a:xfrm>
+          <a:prstGeom prst="line">
+            <a:avLst/>
+          </a:prstGeom>
+          <a:noFill/>
+          <a:ln w="6350">
+            <a:solidFill>
+              <a:srgbClr val="16324F"/>
+            </a:solidFill>
+            <a:prstDash val="solid"/>
+          </a:ln>
+        </p:spPr>
+        <p:txBody>
+          <a:bodyPr/>
+          <a:p/>
+        </p:txBody>
+      </p:sp>
+      <p:sp>
+        <p:nvSpPr>
+          <p:cNvPr id="12" name="Shape 10"/>
+          <p:cNvSpPr/>
+          <p:nvPr/>
+        </p:nvSpPr>
+        <p:spPr>
+          <a:xfrm>
+            <a:off x="8348472" y="0"/>
+            <a:ext cx="0" cy="6858000"/>
+          </a:xfrm>
+          <a:prstGeom prst="line">
+            <a:avLst/>
+          </a:prstGeom>
+          <a:noFill/>
+          <a:ln w="6350">
+            <a:solidFill>
+              <a:srgbClr val="16324F"/>
+            </a:solidFill>
+            <a:prstDash val="solid"/>
+          </a:ln>
+        </p:spPr>
+        <p:txBody>
+          <a:bodyPr/>
+          <a:p/>
+        </p:txBody>
+      </p:sp>
+      <p:sp>
+        <p:nvSpPr>
+          <p:cNvPr id="13" name="Shape 11"/>
+          <p:cNvSpPr/>
+          <p:nvPr/>
+        </p:nvSpPr>
+        <p:spPr>
+          <a:xfrm>
+            <a:off x="9107424" y="0"/>
+            <a:ext cx="0" cy="6858000"/>
+          </a:xfrm>
+          <a:prstGeom prst="line">
+            <a:avLst/>
+          </a:prstGeom>
+          <a:noFill/>
+          <a:ln w="6350">
+            <a:solidFill>
+              <a:srgbClr val="16324F"/>
+            </a:solidFill>
+            <a:prstDash val="solid"/>
+          </a:ln>
+        </p:spPr>
+        <p:txBody>
+          <a:bodyPr/>
+          <a:p/>
+        </p:txBody>
+      </p:sp>
+      <p:sp>
+        <p:nvSpPr>
+          <p:cNvPr id="14" name="Shape 12"/>
+          <p:cNvSpPr/>
+          <p:nvPr/>
+        </p:nvSpPr>
+        <p:spPr>
+          <a:xfrm>
+            <a:off x="9866376" y="0"/>
+            <a:ext cx="0" cy="6858000"/>
+          </a:xfrm>
+          <a:prstGeom prst="line">
+            <a:avLst/>
+          </a:prstGeom>
+          <a:noFill/>
+          <a:ln w="6350">
+            <a:solidFill>
+              <a:srgbClr val="16324F"/>
+            </a:solidFill>
+            <a:prstDash val="solid"/>
+          </a:ln>
+        </p:spPr>
+        <p:txBody>
+          <a:bodyPr/>
+          <a:p/>
+        </p:txBody>
+      </p:sp>
+      <p:sp>
+        <p:nvSpPr>
+          <p:cNvPr id="15" name="Shape 13"/>
+          <p:cNvSpPr/>
+          <p:nvPr/>
+        </p:nvSpPr>
+        <p:spPr>
+          <a:xfrm>
+            <a:off x="10625328" y="0"/>
+            <a:ext cx="0" cy="6858000"/>
+          </a:xfrm>
+          <a:prstGeom prst="line">
+            <a:avLst/>
+          </a:prstGeom>
+          <a:noFill/>
+          <a:ln w="6350">
+            <a:solidFill>
+              <a:srgbClr val="16324F"/>
+            </a:solidFill>
+            <a:prstDash val="solid"/>
+          </a:ln>
+        </p:spPr>
+        <p:txBody>
+          <a:bodyPr/>
+          <a:p/>
+        </p:txBody>
+      </p:sp>
+      <p:sp>
+        <p:nvSpPr>
+          <p:cNvPr id="16" name="Shape 14"/>
+          <p:cNvSpPr/>
+          <p:nvPr/>
+        </p:nvSpPr>
+        <p:spPr>
+          <a:xfrm>
+            <a:off x="11384280" y="0"/>
+            <a:ext cx="0" cy="6858000"/>
+          </a:xfrm>
+          <a:prstGeom prst="line">
+            <a:avLst/>
+          </a:prstGeom>
+          <a:noFill/>
+          <a:ln w="6350">
+            <a:solidFill>
+              <a:srgbClr val="16324F"/>
+            </a:solidFill>
+            <a:prstDash val="solid"/>
+          </a:ln>
+        </p:spPr>
+        <p:txBody>
+          <a:bodyPr/>
+          <a:p/>
+        </p:txBody>
+      </p:sp>
+      <p:sp>
+        <p:nvSpPr>
+          <p:cNvPr id="17" name="Shape 15"/>
+          <p:cNvSpPr/>
+          <p:nvPr/>
+        </p:nvSpPr>
+        <p:spPr>
+          <a:xfrm>
+            <a:off x="12143232" y="0"/>
+            <a:ext cx="0" cy="6858000"/>
+          </a:xfrm>
+          <a:prstGeom prst="line">
+            <a:avLst/>
+          </a:prstGeom>
+          <a:noFill/>
+          <a:ln w="6350">
+            <a:solidFill>
+              <a:srgbClr val="16324F"/>
+            </a:solidFill>
+            <a:prstDash val="solid"/>
+          </a:ln>
+        </p:spPr>
+        <p:txBody>
+          <a:bodyPr/>
+          <a:p/>
+        </p:txBody>
+      </p:sp>
+      <p:sp>
+        <p:nvSpPr>
+          <p:cNvPr id="18" name="Shape 16"/>
+          <p:cNvSpPr/>
+          <p:nvPr/>
+        </p:nvSpPr>
+        <p:spPr>
+          <a:xfrm>
+            <a:off x="0" y="758952"/>
+            <a:ext cx="12191695" cy="0"/>
+          </a:xfrm>
+          <a:prstGeom prst="line">
+            <a:avLst/>
+          </a:prstGeom>
+          <a:noFill/>
+          <a:ln w="6350">
+            <a:solidFill>
+              <a:srgbClr val="16324F"/>
+            </a:solidFill>
+            <a:prstDash val="solid"/>
+          </a:ln>
+        </p:spPr>
+        <p:txBody>
+          <a:bodyPr/>
+          <a:p/>
+        </p:txBody>
+      </p:sp>
+      <p:sp>
+        <p:nvSpPr>
+          <p:cNvPr id="19" name="Shape 17"/>
+          <p:cNvSpPr/>
+          <p:nvPr/>
+        </p:nvSpPr>
+        <p:spPr>
+          <a:xfrm>
+            <a:off x="0" y="1517904"/>
+            <a:ext cx="12191695" cy="0"/>
+          </a:xfrm>
+          <a:prstGeom prst="line">
+            <a:avLst/>
+          </a:prstGeom>
+          <a:noFill/>
+          <a:ln w="6350">
+            <a:solidFill>
+              <a:srgbClr val="16324F"/>
+            </a:solidFill>
+            <a:prstDash val="solid"/>
+          </a:ln>
+        </p:spPr>
+        <p:txBody>
+          <a:bodyPr/>
+          <a:p/>
+        </p:txBody>
+      </p:sp>
+      <p:sp>
+        <p:nvSpPr>
+          <p:cNvPr id="20" name="Shape 18"/>
+          <p:cNvSpPr/>
+          <p:nvPr/>
+        </p:nvSpPr>
+        <p:spPr>
+          <a:xfrm>
+            <a:off x="0" y="2276856"/>
+            <a:ext cx="12191695" cy="0"/>
+          </a:xfrm>
+          <a:prstGeom prst="line">
+            <a:avLst/>
+          </a:prstGeom>
+          <a:noFill/>
+          <a:ln w="6350">
+            <a:solidFill>
+              <a:srgbClr val="16324F"/>
+            </a:solidFill>
+            <a:prstDash val="solid"/>
+          </a:ln>
+        </p:spPr>
+        <p:txBody>
+          <a:bodyPr/>
+          <a:p/>
+        </p:txBody>
+      </p:sp>
+      <p:sp>
+        <p:nvSpPr>
+          <p:cNvPr id="21" name="Shape 19"/>
+          <p:cNvSpPr/>
+          <p:nvPr/>
+        </p:nvSpPr>
+        <p:spPr>
+          <a:xfrm>
+            <a:off x="0" y="3035808"/>
+            <a:ext cx="12191695" cy="0"/>
+          </a:xfrm>
+          <a:prstGeom prst="line">
+            <a:avLst/>
+          </a:prstGeom>
+          <a:noFill/>
+          <a:ln w="6350">
+            <a:solidFill>
+              <a:srgbClr val="16324F"/>
+            </a:solidFill>
+            <a:prstDash val="solid"/>
+          </a:ln>
+        </p:spPr>
+        <p:txBody>
+          <a:bodyPr/>
+          <a:p/>
+        </p:txBody>
+      </p:sp>
+      <p:sp>
+        <p:nvSpPr>
+          <p:cNvPr id="22" name="Shape 20"/>
+          <p:cNvSpPr/>
+          <p:nvPr/>
+        </p:nvSpPr>
+        <p:spPr>
+          <a:xfrm>
+            <a:off x="0" y="3794760"/>
+            <a:ext cx="12191695" cy="0"/>
+          </a:xfrm>
+          <a:prstGeom prst="line">
+            <a:avLst/>
+          </a:prstGeom>
+          <a:noFill/>
+          <a:ln w="6350">
+            <a:solidFill>
+              <a:srgbClr val="16324F"/>
+            </a:solidFill>
+            <a:prstDash val="solid"/>
+          </a:ln>
+        </p:spPr>
+        <p:txBody>
+          <a:bodyPr/>
+          <a:p/>
+        </p:txBody>
+      </p:sp>
+      <p:sp>
+        <p:nvSpPr>
+          <p:cNvPr id="23" name="Shape 21"/>
+          <p:cNvSpPr/>
+          <p:nvPr/>
+        </p:nvSpPr>
+        <p:spPr>
+          <a:xfrm>
+            <a:off x="0" y="4553712"/>
+            <a:ext cx="12191695" cy="0"/>
+          </a:xfrm>
+          <a:prstGeom prst="line">
+            <a:avLst/>
+          </a:prstGeom>
+          <a:noFill/>
+          <a:ln w="6350">
+            <a:solidFill>
+              <a:srgbClr val="16324F"/>
+            </a:solidFill>
+            <a:prstDash val="solid"/>
+          </a:ln>
+        </p:spPr>
+        <p:txBody>
+          <a:bodyPr/>
+          <a:p/>
+        </p:txBody>
+      </p:sp>
+      <p:sp>
+        <p:nvSpPr>
+          <p:cNvPr id="24" name="Shape 22"/>
+          <p:cNvSpPr/>
+          <p:nvPr/>
+        </p:nvSpPr>
+        <p:spPr>
+          <a:xfrm>
+            <a:off x="0" y="5312664"/>
+            <a:ext cx="12191695" cy="0"/>
+          </a:xfrm>
+          <a:prstGeom prst="line">
+            <a:avLst/>
+          </a:prstGeom>
+          <a:noFill/>
+          <a:ln w="6350">
+            <a:solidFill>
+              <a:srgbClr val="16324F"/>
+            </a:solidFill>
+            <a:prstDash val="solid"/>
+          </a:ln>
+        </p:spPr>
+        <p:txBody>
+          <a:bodyPr/>
+          <a:p/>
+        </p:txBody>
+      </p:sp>
+      <p:sp>
+        <p:nvSpPr>
+          <p:cNvPr id="25" name="Shape 23"/>
+          <p:cNvSpPr/>
+          <p:nvPr/>
+        </p:nvSpPr>
+        <p:spPr>
+          <a:xfrm>
+            <a:off x="0" y="6071616"/>
+            <a:ext cx="12191695" cy="0"/>
+          </a:xfrm>
+          <a:prstGeom prst="line">
+            <a:avLst/>
+          </a:prstGeom>
+          <a:noFill/>
+          <a:ln w="6350">
+            <a:solidFill>
+              <a:srgbClr val="16324F"/>
+            </a:solidFill>
+            <a:prstDash val="solid"/>
+          </a:ln>
+        </p:spPr>
+        <p:txBody>
+          <a:bodyPr/>
+          <a:p/>
+        </p:txBody>
+      </p:sp>
+      <p:sp>
+        <p:nvSpPr>
+          <p:cNvPr id="26" name="Shape 24"/>
+          <p:cNvSpPr/>
+          <p:nvPr/>
+        </p:nvSpPr>
+        <p:spPr>
+          <a:xfrm>
+            <a:off x="0" y="6830568"/>
+            <a:ext cx="12191695" cy="0"/>
+          </a:xfrm>
+          <a:prstGeom prst="line">
+            <a:avLst/>
+          </a:prstGeom>
+          <a:noFill/>
+          <a:ln w="6350">
+            <a:solidFill>
+              <a:srgbClr val="16324F"/>
+            </a:solidFill>
+            <a:prstDash val="solid"/>
+          </a:ln>
+        </p:spPr>
+        <p:txBody>
+          <a:bodyPr/>
+          <a:p/>
+        </p:txBody>
+      </p:sp>
+      <p:sp>
+        <p:nvSpPr>
+          <p:cNvPr id="27" name="Text 25"/>
+          <p:cNvSpPr txBox="1"/>
+          <p:nvPr/>
+        </p:nvSpPr>
+        <p:spPr>
+          <a:xfrm>
+            <a:off x="7955280" y="365760"/>
+            <a:ext cx="3931920" cy="6126480"/>
+          </a:xfrm>
+          <a:prstGeom prst="rect">
+            <a:avLst/>
+          </a:prstGeom>
+          <a:noFill/>
+          <a:ln/>
+        </p:spPr>
+        <p:txBody>
+          <a:bodyPr wrap="square" lIns="0" tIns="0" rIns="0" bIns="0" rtlCol="0" anchor="ctr"/>
+          <a:lstStyle/>
+          <a:p>
+            <a:pPr algn="r" indent="0" marL="0">
+              <a:buNone/>
+            </a:pPr>
+            <a:r>
+              <a:rPr lang="en-US" sz="34000" b="1" dirty="0">
+                <a:solidFill>
+                  <a:srgbClr val="0A2035"/>
+                </a:solidFill>
+                <a:latin typeface="Cambria" pitchFamily="34" charset="0"/>
+                <a:ea typeface="Cambria" pitchFamily="34" charset="-122"/>
+                <a:cs typeface="Cambria" pitchFamily="34" charset="-120"/>
+              </a:rPr>
+              <a:t>03</a:t>
+            </a:r>
+            <a:endParaRPr lang="en-US" sz="34000" dirty="0"/>
+          </a:p>
+        </p:txBody>
+      </p:sp>
+      <p:sp>
+        <p:nvSpPr>
+          <p:cNvPr id="28" name="Shape 26"/>
+          <p:cNvSpPr/>
+          <p:nvPr/>
+        </p:nvSpPr>
+        <p:spPr>
+          <a:xfrm>
+            <a:off x="685800" y="731520"/>
+            <a:ext cx="2359152" cy="420624"/>
+          </a:xfrm>
+          <a:prstGeom prst="roundRect">
+            <a:avLst>
+              <a:gd name="adj" fmla="val 50000"/>
+            </a:avLst>
+          </a:prstGeom>
+          <a:solidFill>
+            <a:srgbClr val="D97706"/>
+          </a:solidFill>
+          <a:ln/>
+        </p:spPr>
+        <p:txBody>
+          <a:bodyPr/>
+          <a:p/>
+        </p:txBody>
+      </p:sp>
+      <p:sp>
+        <p:nvSpPr>
+          <p:cNvPr id="29" name="Text 27"/>
+          <p:cNvSpPr txBox="1"/>
+          <p:nvPr/>
+        </p:nvSpPr>
+        <p:spPr>
+          <a:xfrm>
+            <a:off x="685800" y="731520"/>
+            <a:ext cx="2359152" cy="420624"/>
+          </a:xfrm>
+          <a:prstGeom prst="rect">
+            <a:avLst/>
+          </a:prstGeom>
+          <a:noFill/>
+          <a:ln/>
+        </p:spPr>
+        <p:txBody>
+          <a:bodyPr wrap="square" lIns="0" tIns="0" rIns="0" bIns="0" rtlCol="0" anchor="ctr"/>
+          <a:lstStyle/>
+          <a:p>
+            <a:pPr algn="ctr" indent="0" marL="0">
+              <a:buNone/>
+            </a:pPr>
+            <a:r>
+              <a:rPr lang="en-US" sz="1300" b="1" spc="100" kern="0" dirty="0">
+                <a:solidFill>
+                  <a:srgbClr val="FFFFFF"/>
+                </a:solidFill>
+                <a:latin typeface="Calibri" pitchFamily="34" charset="0"/>
+                <a:ea typeface="Calibri" pitchFamily="34" charset="-122"/>
+                <a:cs typeface="Calibri" pitchFamily="34" charset="-120"/>
+              </a:rPr>
+              <a:t>UNIT 3 · WEEKS 12–16</a:t>
+            </a:r>
+            <a:endParaRPr lang="en-US" sz="1300" dirty="0"/>
+          </a:p>
+        </p:txBody>
+      </p:sp>
+      <p:sp>
+        <p:nvSpPr>
+          <p:cNvPr id="30" name="Text 28"/>
+          <p:cNvSpPr txBox="1"/>
+          <p:nvPr/>
+        </p:nvSpPr>
+        <p:spPr>
+          <a:xfrm>
+            <a:off x="685800" y="2331720"/>
+            <a:ext cx="8778240" cy="1554480"/>
+          </a:xfrm>
+          <a:prstGeom prst="rect">
+            <a:avLst/>
+          </a:prstGeom>
+          <a:noFill/>
+          <a:ln/>
+        </p:spPr>
+        <p:txBody>
+          <a:bodyPr wrap="square" lIns="0" tIns="0" rIns="0" bIns="0" rtlCol="0" anchor="ctr"/>
+          <a:lstStyle/>
+          <a:p>
+            <a:pPr indent="0" marL="0">
+              <a:lnSpc>
+                <a:spcPct val="102000"/>
+              </a:lnSpc>
+              <a:buNone/>
+            </a:pPr>
+            <a:r>
+              <a:rPr lang="en-US" sz="4000" b="1" dirty="0">
+                <a:solidFill>
+                  <a:srgbClr val="FFFFFF"/>
+                </a:solidFill>
+                <a:latin typeface="Cambria" pitchFamily="34" charset="0"/>
+                <a:ea typeface="Cambria" pitchFamily="34" charset="-122"/>
+                <a:cs typeface="Cambria" pitchFamily="34" charset="-120"/>
+              </a:rPr>
+              <a:t>Design for Manufacturing</a:t>
+            </a:r>
+            <a:endParaRPr lang="en-US" sz="4000" dirty="0"/>
+          </a:p>
+        </p:txBody>
+      </p:sp>
+      <p:sp>
+        <p:nvSpPr>
+          <p:cNvPr id="31" name="Text 29"/>
+          <p:cNvSpPr txBox="1"/>
+          <p:nvPr/>
+        </p:nvSpPr>
+        <p:spPr>
+          <a:xfrm>
+            <a:off x="685800" y="3611880"/>
+            <a:ext cx="7863840" cy="822960"/>
+          </a:xfrm>
+          <a:prstGeom prst="rect">
+            <a:avLst/>
+          </a:prstGeom>
+          <a:noFill/>
+          <a:ln/>
+        </p:spPr>
+        <p:txBody>
+          <a:bodyPr wrap="square" lIns="0" tIns="0" rIns="0" bIns="0" rtlCol="0" anchor="ctr"/>
+          <a:lstStyle/>
+          <a:p>
+            <a:pPr indent="0" marL="0">
+              <a:buNone/>
+            </a:pPr>
+            <a:r>
+              <a:rPr lang="en-US" sz="1700" i="1" dirty="0">
+                <a:solidFill>
+                  <a:srgbClr val="CFE3F2"/>
+                </a:solidFill>
+                <a:latin typeface="Calibri" pitchFamily="34" charset="0"/>
+                <a:ea typeface="Calibri" pitchFamily="34" charset="-122"/>
+                <a:cs typeface="Calibri" pitchFamily="34" charset="-120"/>
+              </a:rPr>
+              <a:t>State tolerances and fits, then close the loop from CAD model to physical part — manufacturing-ready files, process limits, and shop safety.</a:t>
+            </a:r>
+            <a:endParaRPr lang="en-US" sz="1700" dirty="0"/>
+          </a:p>
+        </p:txBody>
+      </p:sp>
+      <p:sp>
+        <p:nvSpPr>
+          <p:cNvPr id="32" name="Shape 30"/>
+          <p:cNvSpPr/>
+          <p:nvPr/>
+        </p:nvSpPr>
+        <p:spPr>
+          <a:xfrm>
+            <a:off x="685800" y="5806440"/>
+            <a:ext cx="3383280" cy="438912"/>
+          </a:xfrm>
+          <a:prstGeom prst="roundRect">
+            <a:avLst>
+              <a:gd name="adj" fmla="val 20833"/>
+            </a:avLst>
+          </a:prstGeom>
+          <a:solidFill>
+            <a:srgbClr val="16324F"/>
+          </a:solidFill>
+          <a:ln w="12700">
+            <a:solidFill>
+              <a:srgbClr val="D97706"/>
+            </a:solidFill>
+            <a:prstDash val="solid"/>
+          </a:ln>
+        </p:spPr>
+        <p:txBody>
+          <a:bodyPr/>
+          <a:p/>
+        </p:txBody>
+      </p:sp>
+      <p:sp>
+        <p:nvSpPr>
+          <p:cNvPr id="33" name="Text 31"/>
+          <p:cNvSpPr txBox="1"/>
+          <p:nvPr/>
+        </p:nvSpPr>
+        <p:spPr>
+          <a:xfrm>
+            <a:off x="685800" y="5806440"/>
+            <a:ext cx="3383280" cy="438912"/>
+          </a:xfrm>
+          <a:prstGeom prst="rect">
+            <a:avLst/>
+          </a:prstGeom>
+          <a:noFill/>
+          <a:ln/>
+        </p:spPr>
+        <p:txBody>
+          <a:bodyPr wrap="square" lIns="0" tIns="0" rIns="0" bIns="0" rtlCol="0" anchor="ctr"/>
+          <a:lstStyle/>
+          <a:p>
+            <a:pPr algn="ctr" indent="0" marL="0">
+              <a:buNone/>
+            </a:pPr>
+            <a:r>
+              <a:rPr lang="en-US" sz="1300" dirty="0">
+                <a:solidFill>
+                  <a:srgbClr val="CFE3F2"/>
+                </a:solidFill>
+                <a:latin typeface="Calibri" pitchFamily="34" charset="0"/>
+                <a:ea typeface="Calibri" pitchFamily="34" charset="-122"/>
+                <a:cs typeface="Calibri" pitchFamily="34" charset="-120"/>
+              </a:rPr>
+              <a:t>COMPETENCY CHECK IN WEEK 16</a:t>
+            </a:r>
+            <a:endParaRPr lang="en-US" sz="1300" dirty="0"/>
           </a:p>
         </p:txBody>
       </p:sp>
@@ -33719,968 +33183,6 @@
 
 <file path=ppt/slides/slide40.xml><?xml version="1.0" encoding="utf-8"?>
 <p:sld xmlns:a="http://schemas.openxmlformats.org/drawingml/2006/main" xmlns:r="http://schemas.openxmlformats.org/officeDocument/2006/relationships" xmlns:p="http://schemas.openxmlformats.org/presentationml/2006/main">
-  <p:cSld name="Slide 44">
-    <p:bg>
-      <p:bgPr>
-        <a:solidFill>
-          <a:srgbClr val="0F2942"/>
-        </a:solidFill>
-      </p:bgPr>
-    </p:bg>
-    <p:spTree>
-      <p:nvGrpSpPr>
-        <p:cNvPr id="1" name=""/>
-        <p:cNvGrpSpPr/>
-        <p:nvPr/>
-      </p:nvGrpSpPr>
-      <p:grpSpPr>
-        <a:xfrm>
-          <a:off x="0" y="0"/>
-          <a:ext cx="0" cy="0"/>
-          <a:chOff x="0" y="0"/>
-          <a:chExt cx="0" cy="0"/>
-        </a:xfrm>
-      </p:grpSpPr>
-      <p:sp>
-        <p:nvSpPr>
-          <p:cNvPr id="2" name="Shape 0"/>
-          <p:cNvSpPr/>
-          <p:nvPr/>
-        </p:nvSpPr>
-        <p:spPr>
-          <a:xfrm>
-            <a:off x="758952" y="0"/>
-            <a:ext cx="0" cy="6858000"/>
-          </a:xfrm>
-          <a:prstGeom prst="line">
-            <a:avLst/>
-          </a:prstGeom>
-          <a:noFill/>
-          <a:ln w="6350">
-            <a:solidFill>
-              <a:srgbClr val="16324F"/>
-            </a:solidFill>
-            <a:prstDash val="solid"/>
-          </a:ln>
-        </p:spPr>
-        <p:txBody>
-          <a:bodyPr/>
-          <a:p/>
-        </p:txBody>
-      </p:sp>
-      <p:sp>
-        <p:nvSpPr>
-          <p:cNvPr id="3" name="Shape 1"/>
-          <p:cNvSpPr/>
-          <p:nvPr/>
-        </p:nvSpPr>
-        <p:spPr>
-          <a:xfrm>
-            <a:off x="1517904" y="0"/>
-            <a:ext cx="0" cy="6858000"/>
-          </a:xfrm>
-          <a:prstGeom prst="line">
-            <a:avLst/>
-          </a:prstGeom>
-          <a:noFill/>
-          <a:ln w="6350">
-            <a:solidFill>
-              <a:srgbClr val="16324F"/>
-            </a:solidFill>
-            <a:prstDash val="solid"/>
-          </a:ln>
-        </p:spPr>
-        <p:txBody>
-          <a:bodyPr/>
-          <a:p/>
-        </p:txBody>
-      </p:sp>
-      <p:sp>
-        <p:nvSpPr>
-          <p:cNvPr id="4" name="Shape 2"/>
-          <p:cNvSpPr/>
-          <p:nvPr/>
-        </p:nvSpPr>
-        <p:spPr>
-          <a:xfrm>
-            <a:off x="2276856" y="0"/>
-            <a:ext cx="0" cy="6858000"/>
-          </a:xfrm>
-          <a:prstGeom prst="line">
-            <a:avLst/>
-          </a:prstGeom>
-          <a:noFill/>
-          <a:ln w="6350">
-            <a:solidFill>
-              <a:srgbClr val="16324F"/>
-            </a:solidFill>
-            <a:prstDash val="solid"/>
-          </a:ln>
-        </p:spPr>
-        <p:txBody>
-          <a:bodyPr/>
-          <a:p/>
-        </p:txBody>
-      </p:sp>
-      <p:sp>
-        <p:nvSpPr>
-          <p:cNvPr id="5" name="Shape 3"/>
-          <p:cNvSpPr/>
-          <p:nvPr/>
-        </p:nvSpPr>
-        <p:spPr>
-          <a:xfrm>
-            <a:off x="3035808" y="0"/>
-            <a:ext cx="0" cy="6858000"/>
-          </a:xfrm>
-          <a:prstGeom prst="line">
-            <a:avLst/>
-          </a:prstGeom>
-          <a:noFill/>
-          <a:ln w="6350">
-            <a:solidFill>
-              <a:srgbClr val="16324F"/>
-            </a:solidFill>
-            <a:prstDash val="solid"/>
-          </a:ln>
-        </p:spPr>
-        <p:txBody>
-          <a:bodyPr/>
-          <a:p/>
-        </p:txBody>
-      </p:sp>
-      <p:sp>
-        <p:nvSpPr>
-          <p:cNvPr id="6" name="Shape 4"/>
-          <p:cNvSpPr/>
-          <p:nvPr/>
-        </p:nvSpPr>
-        <p:spPr>
-          <a:xfrm>
-            <a:off x="3794760" y="0"/>
-            <a:ext cx="0" cy="6858000"/>
-          </a:xfrm>
-          <a:prstGeom prst="line">
-            <a:avLst/>
-          </a:prstGeom>
-          <a:noFill/>
-          <a:ln w="6350">
-            <a:solidFill>
-              <a:srgbClr val="16324F"/>
-            </a:solidFill>
-            <a:prstDash val="solid"/>
-          </a:ln>
-        </p:spPr>
-        <p:txBody>
-          <a:bodyPr/>
-          <a:p/>
-        </p:txBody>
-      </p:sp>
-      <p:sp>
-        <p:nvSpPr>
-          <p:cNvPr id="7" name="Shape 5"/>
-          <p:cNvSpPr/>
-          <p:nvPr/>
-        </p:nvSpPr>
-        <p:spPr>
-          <a:xfrm>
-            <a:off x="4553712" y="0"/>
-            <a:ext cx="0" cy="6858000"/>
-          </a:xfrm>
-          <a:prstGeom prst="line">
-            <a:avLst/>
-          </a:prstGeom>
-          <a:noFill/>
-          <a:ln w="6350">
-            <a:solidFill>
-              <a:srgbClr val="16324F"/>
-            </a:solidFill>
-            <a:prstDash val="solid"/>
-          </a:ln>
-        </p:spPr>
-        <p:txBody>
-          <a:bodyPr/>
-          <a:p/>
-        </p:txBody>
-      </p:sp>
-      <p:sp>
-        <p:nvSpPr>
-          <p:cNvPr id="8" name="Shape 6"/>
-          <p:cNvSpPr/>
-          <p:nvPr/>
-        </p:nvSpPr>
-        <p:spPr>
-          <a:xfrm>
-            <a:off x="5312664" y="0"/>
-            <a:ext cx="0" cy="6858000"/>
-          </a:xfrm>
-          <a:prstGeom prst="line">
-            <a:avLst/>
-          </a:prstGeom>
-          <a:noFill/>
-          <a:ln w="6350">
-            <a:solidFill>
-              <a:srgbClr val="16324F"/>
-            </a:solidFill>
-            <a:prstDash val="solid"/>
-          </a:ln>
-        </p:spPr>
-        <p:txBody>
-          <a:bodyPr/>
-          <a:p/>
-        </p:txBody>
-      </p:sp>
-      <p:sp>
-        <p:nvSpPr>
-          <p:cNvPr id="9" name="Shape 7"/>
-          <p:cNvSpPr/>
-          <p:nvPr/>
-        </p:nvSpPr>
-        <p:spPr>
-          <a:xfrm>
-            <a:off x="6071616" y="0"/>
-            <a:ext cx="0" cy="6858000"/>
-          </a:xfrm>
-          <a:prstGeom prst="line">
-            <a:avLst/>
-          </a:prstGeom>
-          <a:noFill/>
-          <a:ln w="6350">
-            <a:solidFill>
-              <a:srgbClr val="16324F"/>
-            </a:solidFill>
-            <a:prstDash val="solid"/>
-          </a:ln>
-        </p:spPr>
-        <p:txBody>
-          <a:bodyPr/>
-          <a:p/>
-        </p:txBody>
-      </p:sp>
-      <p:sp>
-        <p:nvSpPr>
-          <p:cNvPr id="10" name="Shape 8"/>
-          <p:cNvSpPr/>
-          <p:nvPr/>
-        </p:nvSpPr>
-        <p:spPr>
-          <a:xfrm>
-            <a:off x="6830568" y="0"/>
-            <a:ext cx="0" cy="6858000"/>
-          </a:xfrm>
-          <a:prstGeom prst="line">
-            <a:avLst/>
-          </a:prstGeom>
-          <a:noFill/>
-          <a:ln w="6350">
-            <a:solidFill>
-              <a:srgbClr val="16324F"/>
-            </a:solidFill>
-            <a:prstDash val="solid"/>
-          </a:ln>
-        </p:spPr>
-        <p:txBody>
-          <a:bodyPr/>
-          <a:p/>
-        </p:txBody>
-      </p:sp>
-      <p:sp>
-        <p:nvSpPr>
-          <p:cNvPr id="11" name="Shape 9"/>
-          <p:cNvSpPr/>
-          <p:nvPr/>
-        </p:nvSpPr>
-        <p:spPr>
-          <a:xfrm>
-            <a:off x="7589520" y="0"/>
-            <a:ext cx="0" cy="6858000"/>
-          </a:xfrm>
-          <a:prstGeom prst="line">
-            <a:avLst/>
-          </a:prstGeom>
-          <a:noFill/>
-          <a:ln w="6350">
-            <a:solidFill>
-              <a:srgbClr val="16324F"/>
-            </a:solidFill>
-            <a:prstDash val="solid"/>
-          </a:ln>
-        </p:spPr>
-        <p:txBody>
-          <a:bodyPr/>
-          <a:p/>
-        </p:txBody>
-      </p:sp>
-      <p:sp>
-        <p:nvSpPr>
-          <p:cNvPr id="12" name="Shape 10"/>
-          <p:cNvSpPr/>
-          <p:nvPr/>
-        </p:nvSpPr>
-        <p:spPr>
-          <a:xfrm>
-            <a:off x="8348472" y="0"/>
-            <a:ext cx="0" cy="6858000"/>
-          </a:xfrm>
-          <a:prstGeom prst="line">
-            <a:avLst/>
-          </a:prstGeom>
-          <a:noFill/>
-          <a:ln w="6350">
-            <a:solidFill>
-              <a:srgbClr val="16324F"/>
-            </a:solidFill>
-            <a:prstDash val="solid"/>
-          </a:ln>
-        </p:spPr>
-        <p:txBody>
-          <a:bodyPr/>
-          <a:p/>
-        </p:txBody>
-      </p:sp>
-      <p:sp>
-        <p:nvSpPr>
-          <p:cNvPr id="13" name="Shape 11"/>
-          <p:cNvSpPr/>
-          <p:nvPr/>
-        </p:nvSpPr>
-        <p:spPr>
-          <a:xfrm>
-            <a:off x="9107424" y="0"/>
-            <a:ext cx="0" cy="6858000"/>
-          </a:xfrm>
-          <a:prstGeom prst="line">
-            <a:avLst/>
-          </a:prstGeom>
-          <a:noFill/>
-          <a:ln w="6350">
-            <a:solidFill>
-              <a:srgbClr val="16324F"/>
-            </a:solidFill>
-            <a:prstDash val="solid"/>
-          </a:ln>
-        </p:spPr>
-        <p:txBody>
-          <a:bodyPr/>
-          <a:p/>
-        </p:txBody>
-      </p:sp>
-      <p:sp>
-        <p:nvSpPr>
-          <p:cNvPr id="14" name="Shape 12"/>
-          <p:cNvSpPr/>
-          <p:nvPr/>
-        </p:nvSpPr>
-        <p:spPr>
-          <a:xfrm>
-            <a:off x="9866376" y="0"/>
-            <a:ext cx="0" cy="6858000"/>
-          </a:xfrm>
-          <a:prstGeom prst="line">
-            <a:avLst/>
-          </a:prstGeom>
-          <a:noFill/>
-          <a:ln w="6350">
-            <a:solidFill>
-              <a:srgbClr val="16324F"/>
-            </a:solidFill>
-            <a:prstDash val="solid"/>
-          </a:ln>
-        </p:spPr>
-        <p:txBody>
-          <a:bodyPr/>
-          <a:p/>
-        </p:txBody>
-      </p:sp>
-      <p:sp>
-        <p:nvSpPr>
-          <p:cNvPr id="15" name="Shape 13"/>
-          <p:cNvSpPr/>
-          <p:nvPr/>
-        </p:nvSpPr>
-        <p:spPr>
-          <a:xfrm>
-            <a:off x="10625328" y="0"/>
-            <a:ext cx="0" cy="6858000"/>
-          </a:xfrm>
-          <a:prstGeom prst="line">
-            <a:avLst/>
-          </a:prstGeom>
-          <a:noFill/>
-          <a:ln w="6350">
-            <a:solidFill>
-              <a:srgbClr val="16324F"/>
-            </a:solidFill>
-            <a:prstDash val="solid"/>
-          </a:ln>
-        </p:spPr>
-        <p:txBody>
-          <a:bodyPr/>
-          <a:p/>
-        </p:txBody>
-      </p:sp>
-      <p:sp>
-        <p:nvSpPr>
-          <p:cNvPr id="16" name="Shape 14"/>
-          <p:cNvSpPr/>
-          <p:nvPr/>
-        </p:nvSpPr>
-        <p:spPr>
-          <a:xfrm>
-            <a:off x="11384280" y="0"/>
-            <a:ext cx="0" cy="6858000"/>
-          </a:xfrm>
-          <a:prstGeom prst="line">
-            <a:avLst/>
-          </a:prstGeom>
-          <a:noFill/>
-          <a:ln w="6350">
-            <a:solidFill>
-              <a:srgbClr val="16324F"/>
-            </a:solidFill>
-            <a:prstDash val="solid"/>
-          </a:ln>
-        </p:spPr>
-        <p:txBody>
-          <a:bodyPr/>
-          <a:p/>
-        </p:txBody>
-      </p:sp>
-      <p:sp>
-        <p:nvSpPr>
-          <p:cNvPr id="17" name="Shape 15"/>
-          <p:cNvSpPr/>
-          <p:nvPr/>
-        </p:nvSpPr>
-        <p:spPr>
-          <a:xfrm>
-            <a:off x="12143232" y="0"/>
-            <a:ext cx="0" cy="6858000"/>
-          </a:xfrm>
-          <a:prstGeom prst="line">
-            <a:avLst/>
-          </a:prstGeom>
-          <a:noFill/>
-          <a:ln w="6350">
-            <a:solidFill>
-              <a:srgbClr val="16324F"/>
-            </a:solidFill>
-            <a:prstDash val="solid"/>
-          </a:ln>
-        </p:spPr>
-        <p:txBody>
-          <a:bodyPr/>
-          <a:p/>
-        </p:txBody>
-      </p:sp>
-      <p:sp>
-        <p:nvSpPr>
-          <p:cNvPr id="18" name="Shape 16"/>
-          <p:cNvSpPr/>
-          <p:nvPr/>
-        </p:nvSpPr>
-        <p:spPr>
-          <a:xfrm>
-            <a:off x="0" y="758952"/>
-            <a:ext cx="12191695" cy="0"/>
-          </a:xfrm>
-          <a:prstGeom prst="line">
-            <a:avLst/>
-          </a:prstGeom>
-          <a:noFill/>
-          <a:ln w="6350">
-            <a:solidFill>
-              <a:srgbClr val="16324F"/>
-            </a:solidFill>
-            <a:prstDash val="solid"/>
-          </a:ln>
-        </p:spPr>
-        <p:txBody>
-          <a:bodyPr/>
-          <a:p/>
-        </p:txBody>
-      </p:sp>
-      <p:sp>
-        <p:nvSpPr>
-          <p:cNvPr id="19" name="Shape 17"/>
-          <p:cNvSpPr/>
-          <p:nvPr/>
-        </p:nvSpPr>
-        <p:spPr>
-          <a:xfrm>
-            <a:off x="0" y="1517904"/>
-            <a:ext cx="12191695" cy="0"/>
-          </a:xfrm>
-          <a:prstGeom prst="line">
-            <a:avLst/>
-          </a:prstGeom>
-          <a:noFill/>
-          <a:ln w="6350">
-            <a:solidFill>
-              <a:srgbClr val="16324F"/>
-            </a:solidFill>
-            <a:prstDash val="solid"/>
-          </a:ln>
-        </p:spPr>
-        <p:txBody>
-          <a:bodyPr/>
-          <a:p/>
-        </p:txBody>
-      </p:sp>
-      <p:sp>
-        <p:nvSpPr>
-          <p:cNvPr id="20" name="Shape 18"/>
-          <p:cNvSpPr/>
-          <p:nvPr/>
-        </p:nvSpPr>
-        <p:spPr>
-          <a:xfrm>
-            <a:off x="0" y="2276856"/>
-            <a:ext cx="12191695" cy="0"/>
-          </a:xfrm>
-          <a:prstGeom prst="line">
-            <a:avLst/>
-          </a:prstGeom>
-          <a:noFill/>
-          <a:ln w="6350">
-            <a:solidFill>
-              <a:srgbClr val="16324F"/>
-            </a:solidFill>
-            <a:prstDash val="solid"/>
-          </a:ln>
-        </p:spPr>
-        <p:txBody>
-          <a:bodyPr/>
-          <a:p/>
-        </p:txBody>
-      </p:sp>
-      <p:sp>
-        <p:nvSpPr>
-          <p:cNvPr id="21" name="Shape 19"/>
-          <p:cNvSpPr/>
-          <p:nvPr/>
-        </p:nvSpPr>
-        <p:spPr>
-          <a:xfrm>
-            <a:off x="0" y="3035808"/>
-            <a:ext cx="12191695" cy="0"/>
-          </a:xfrm>
-          <a:prstGeom prst="line">
-            <a:avLst/>
-          </a:prstGeom>
-          <a:noFill/>
-          <a:ln w="6350">
-            <a:solidFill>
-              <a:srgbClr val="16324F"/>
-            </a:solidFill>
-            <a:prstDash val="solid"/>
-          </a:ln>
-        </p:spPr>
-        <p:txBody>
-          <a:bodyPr/>
-          <a:p/>
-        </p:txBody>
-      </p:sp>
-      <p:sp>
-        <p:nvSpPr>
-          <p:cNvPr id="22" name="Shape 20"/>
-          <p:cNvSpPr/>
-          <p:nvPr/>
-        </p:nvSpPr>
-        <p:spPr>
-          <a:xfrm>
-            <a:off x="0" y="3794760"/>
-            <a:ext cx="12191695" cy="0"/>
-          </a:xfrm>
-          <a:prstGeom prst="line">
-            <a:avLst/>
-          </a:prstGeom>
-          <a:noFill/>
-          <a:ln w="6350">
-            <a:solidFill>
-              <a:srgbClr val="16324F"/>
-            </a:solidFill>
-            <a:prstDash val="solid"/>
-          </a:ln>
-        </p:spPr>
-        <p:txBody>
-          <a:bodyPr/>
-          <a:p/>
-        </p:txBody>
-      </p:sp>
-      <p:sp>
-        <p:nvSpPr>
-          <p:cNvPr id="23" name="Shape 21"/>
-          <p:cNvSpPr/>
-          <p:nvPr/>
-        </p:nvSpPr>
-        <p:spPr>
-          <a:xfrm>
-            <a:off x="0" y="4553712"/>
-            <a:ext cx="12191695" cy="0"/>
-          </a:xfrm>
-          <a:prstGeom prst="line">
-            <a:avLst/>
-          </a:prstGeom>
-          <a:noFill/>
-          <a:ln w="6350">
-            <a:solidFill>
-              <a:srgbClr val="16324F"/>
-            </a:solidFill>
-            <a:prstDash val="solid"/>
-          </a:ln>
-        </p:spPr>
-        <p:txBody>
-          <a:bodyPr/>
-          <a:p/>
-        </p:txBody>
-      </p:sp>
-      <p:sp>
-        <p:nvSpPr>
-          <p:cNvPr id="24" name="Shape 22"/>
-          <p:cNvSpPr/>
-          <p:nvPr/>
-        </p:nvSpPr>
-        <p:spPr>
-          <a:xfrm>
-            <a:off x="0" y="5312664"/>
-            <a:ext cx="12191695" cy="0"/>
-          </a:xfrm>
-          <a:prstGeom prst="line">
-            <a:avLst/>
-          </a:prstGeom>
-          <a:noFill/>
-          <a:ln w="6350">
-            <a:solidFill>
-              <a:srgbClr val="16324F"/>
-            </a:solidFill>
-            <a:prstDash val="solid"/>
-          </a:ln>
-        </p:spPr>
-        <p:txBody>
-          <a:bodyPr/>
-          <a:p/>
-        </p:txBody>
-      </p:sp>
-      <p:sp>
-        <p:nvSpPr>
-          <p:cNvPr id="25" name="Shape 23"/>
-          <p:cNvSpPr/>
-          <p:nvPr/>
-        </p:nvSpPr>
-        <p:spPr>
-          <a:xfrm>
-            <a:off x="0" y="6071616"/>
-            <a:ext cx="12191695" cy="0"/>
-          </a:xfrm>
-          <a:prstGeom prst="line">
-            <a:avLst/>
-          </a:prstGeom>
-          <a:noFill/>
-          <a:ln w="6350">
-            <a:solidFill>
-              <a:srgbClr val="16324F"/>
-            </a:solidFill>
-            <a:prstDash val="solid"/>
-          </a:ln>
-        </p:spPr>
-        <p:txBody>
-          <a:bodyPr/>
-          <a:p/>
-        </p:txBody>
-      </p:sp>
-      <p:sp>
-        <p:nvSpPr>
-          <p:cNvPr id="26" name="Shape 24"/>
-          <p:cNvSpPr/>
-          <p:nvPr/>
-        </p:nvSpPr>
-        <p:spPr>
-          <a:xfrm>
-            <a:off x="0" y="6830568"/>
-            <a:ext cx="12191695" cy="0"/>
-          </a:xfrm>
-          <a:prstGeom prst="line">
-            <a:avLst/>
-          </a:prstGeom>
-          <a:noFill/>
-          <a:ln w="6350">
-            <a:solidFill>
-              <a:srgbClr val="16324F"/>
-            </a:solidFill>
-            <a:prstDash val="solid"/>
-          </a:ln>
-        </p:spPr>
-        <p:txBody>
-          <a:bodyPr/>
-          <a:p/>
-        </p:txBody>
-      </p:sp>
-      <p:sp>
-        <p:nvSpPr>
-          <p:cNvPr id="27" name="Text 25"/>
-          <p:cNvSpPr txBox="1"/>
-          <p:nvPr/>
-        </p:nvSpPr>
-        <p:spPr>
-          <a:xfrm>
-            <a:off x="7955280" y="365760"/>
-            <a:ext cx="3931920" cy="6126480"/>
-          </a:xfrm>
-          <a:prstGeom prst="rect">
-            <a:avLst/>
-          </a:prstGeom>
-          <a:noFill/>
-          <a:ln/>
-        </p:spPr>
-        <p:txBody>
-          <a:bodyPr wrap="square" lIns="0" tIns="0" rIns="0" bIns="0" rtlCol="0" anchor="ctr"/>
-          <a:lstStyle/>
-          <a:p>
-            <a:pPr algn="r" indent="0" marL="0">
-              <a:buNone/>
-            </a:pPr>
-            <a:r>
-              <a:rPr lang="en-US" sz="34000" b="1" dirty="0">
-                <a:solidFill>
-                  <a:srgbClr val="0A2035"/>
-                </a:solidFill>
-                <a:latin typeface="Cambria" pitchFamily="34" charset="0"/>
-                <a:ea typeface="Cambria" pitchFamily="34" charset="-122"/>
-                <a:cs typeface="Cambria" pitchFamily="34" charset="-120"/>
-              </a:rPr>
-              <a:t>03</a:t>
-            </a:r>
-            <a:endParaRPr lang="en-US" sz="34000" dirty="0"/>
-          </a:p>
-        </p:txBody>
-      </p:sp>
-      <p:sp>
-        <p:nvSpPr>
-          <p:cNvPr id="28" name="Shape 26"/>
-          <p:cNvSpPr/>
-          <p:nvPr/>
-        </p:nvSpPr>
-        <p:spPr>
-          <a:xfrm>
-            <a:off x="685800" y="731520"/>
-            <a:ext cx="2359152" cy="420624"/>
-          </a:xfrm>
-          <a:prstGeom prst="roundRect">
-            <a:avLst>
-              <a:gd name="adj" fmla="val 50000"/>
-            </a:avLst>
-          </a:prstGeom>
-          <a:solidFill>
-            <a:srgbClr val="D97706"/>
-          </a:solidFill>
-          <a:ln/>
-        </p:spPr>
-        <p:txBody>
-          <a:bodyPr/>
-          <a:p/>
-        </p:txBody>
-      </p:sp>
-      <p:sp>
-        <p:nvSpPr>
-          <p:cNvPr id="29" name="Text 27"/>
-          <p:cNvSpPr txBox="1"/>
-          <p:nvPr/>
-        </p:nvSpPr>
-        <p:spPr>
-          <a:xfrm>
-            <a:off x="685800" y="731520"/>
-            <a:ext cx="2359152" cy="420624"/>
-          </a:xfrm>
-          <a:prstGeom prst="rect">
-            <a:avLst/>
-          </a:prstGeom>
-          <a:noFill/>
-          <a:ln/>
-        </p:spPr>
-        <p:txBody>
-          <a:bodyPr wrap="square" lIns="0" tIns="0" rIns="0" bIns="0" rtlCol="0" anchor="ctr"/>
-          <a:lstStyle/>
-          <a:p>
-            <a:pPr algn="ctr" indent="0" marL="0">
-              <a:buNone/>
-            </a:pPr>
-            <a:r>
-              <a:rPr lang="en-US" sz="1300" b="1" spc="100" kern="0" dirty="0">
-                <a:solidFill>
-                  <a:srgbClr val="FFFFFF"/>
-                </a:solidFill>
-                <a:latin typeface="Calibri" pitchFamily="34" charset="0"/>
-                <a:ea typeface="Calibri" pitchFamily="34" charset="-122"/>
-                <a:cs typeface="Calibri" pitchFamily="34" charset="-120"/>
-              </a:rPr>
-              <a:t>UNIT 3 · WEEKS 12–16</a:t>
-            </a:r>
-            <a:endParaRPr lang="en-US" sz="1300" dirty="0"/>
-          </a:p>
-        </p:txBody>
-      </p:sp>
-      <p:sp>
-        <p:nvSpPr>
-          <p:cNvPr id="30" name="Text 28"/>
-          <p:cNvSpPr txBox="1"/>
-          <p:nvPr/>
-        </p:nvSpPr>
-        <p:spPr>
-          <a:xfrm>
-            <a:off x="685800" y="2331720"/>
-            <a:ext cx="8778240" cy="1554480"/>
-          </a:xfrm>
-          <a:prstGeom prst="rect">
-            <a:avLst/>
-          </a:prstGeom>
-          <a:noFill/>
-          <a:ln/>
-        </p:spPr>
-        <p:txBody>
-          <a:bodyPr wrap="square" lIns="0" tIns="0" rIns="0" bIns="0" rtlCol="0" anchor="ctr"/>
-          <a:lstStyle/>
-          <a:p>
-            <a:pPr indent="0" marL="0">
-              <a:lnSpc>
-                <a:spcPct val="102000"/>
-              </a:lnSpc>
-              <a:buNone/>
-            </a:pPr>
-            <a:r>
-              <a:rPr lang="en-US" sz="4000" b="1" dirty="0">
-                <a:solidFill>
-                  <a:srgbClr val="FFFFFF"/>
-                </a:solidFill>
-                <a:latin typeface="Cambria" pitchFamily="34" charset="0"/>
-                <a:ea typeface="Cambria" pitchFamily="34" charset="-122"/>
-                <a:cs typeface="Cambria" pitchFamily="34" charset="-120"/>
-              </a:rPr>
-              <a:t>Design for Manufacturing</a:t>
-            </a:r>
-            <a:endParaRPr lang="en-US" sz="4000" dirty="0"/>
-          </a:p>
-        </p:txBody>
-      </p:sp>
-      <p:sp>
-        <p:nvSpPr>
-          <p:cNvPr id="31" name="Text 29"/>
-          <p:cNvSpPr txBox="1"/>
-          <p:nvPr/>
-        </p:nvSpPr>
-        <p:spPr>
-          <a:xfrm>
-            <a:off x="685800" y="3611880"/>
-            <a:ext cx="7863840" cy="822960"/>
-          </a:xfrm>
-          <a:prstGeom prst="rect">
-            <a:avLst/>
-          </a:prstGeom>
-          <a:noFill/>
-          <a:ln/>
-        </p:spPr>
-        <p:txBody>
-          <a:bodyPr wrap="square" lIns="0" tIns="0" rIns="0" bIns="0" rtlCol="0" anchor="ctr"/>
-          <a:lstStyle/>
-          <a:p>
-            <a:pPr indent="0" marL="0">
-              <a:buNone/>
-            </a:pPr>
-            <a:r>
-              <a:rPr lang="en-US" sz="1700" i="1" dirty="0">
-                <a:solidFill>
-                  <a:srgbClr val="CFE3F2"/>
-                </a:solidFill>
-                <a:latin typeface="Calibri" pitchFamily="34" charset="0"/>
-                <a:ea typeface="Calibri" pitchFamily="34" charset="-122"/>
-                <a:cs typeface="Calibri" pitchFamily="34" charset="-120"/>
-              </a:rPr>
-              <a:t>State tolerances and fits, then close the loop from CAD model to physical part — manufacturing-ready files, process limits, and shop safety.</a:t>
-            </a:r>
-            <a:endParaRPr lang="en-US" sz="1700" dirty="0"/>
-          </a:p>
-        </p:txBody>
-      </p:sp>
-      <p:sp>
-        <p:nvSpPr>
-          <p:cNvPr id="32" name="Shape 30"/>
-          <p:cNvSpPr/>
-          <p:nvPr/>
-        </p:nvSpPr>
-        <p:spPr>
-          <a:xfrm>
-            <a:off x="685800" y="5806440"/>
-            <a:ext cx="1828800" cy="438912"/>
-          </a:xfrm>
-          <a:prstGeom prst="roundRect">
-            <a:avLst>
-              <a:gd name="adj" fmla="val 20833"/>
-            </a:avLst>
-          </a:prstGeom>
-          <a:solidFill>
-            <a:srgbClr val="16324F"/>
-          </a:solidFill>
-          <a:ln w="12700">
-            <a:solidFill>
-              <a:srgbClr val="D97706"/>
-            </a:solidFill>
-            <a:prstDash val="solid"/>
-          </a:ln>
-        </p:spPr>
-        <p:txBody>
-          <a:bodyPr/>
-          <a:p/>
-        </p:txBody>
-      </p:sp>
-      <p:sp>
-        <p:nvSpPr>
-          <p:cNvPr id="33" name="Text 31"/>
-          <p:cNvSpPr txBox="1"/>
-          <p:nvPr/>
-        </p:nvSpPr>
-        <p:spPr>
-          <a:xfrm>
-            <a:off x="685800" y="5806440"/>
-            <a:ext cx="1828800" cy="438912"/>
-          </a:xfrm>
-          <a:prstGeom prst="rect">
-            <a:avLst/>
-          </a:prstGeom>
-          <a:noFill/>
-          <a:ln/>
-        </p:spPr>
-        <p:txBody>
-          <a:bodyPr wrap="square" lIns="0" tIns="0" rIns="0" bIns="0" rtlCol="0" anchor="ctr"/>
-          <a:lstStyle/>
-          <a:p>
-            <a:pPr algn="ctr" indent="0" marL="0">
-              <a:buNone/>
-            </a:pPr>
-            <a:r>
-              <a:rPr lang="en-US" sz="1300" dirty="0">
-                <a:solidFill>
-                  <a:srgbClr val="CFE3F2"/>
-                </a:solidFill>
-                <a:latin typeface="Calibri" pitchFamily="34" charset="0"/>
-                <a:ea typeface="Calibri" pitchFamily="34" charset="-122"/>
-                <a:cs typeface="Calibri" pitchFamily="34" charset="-120"/>
-              </a:rPr>
-              <a:t>QUIZ IN WEEK 16</a:t>
-            </a:r>
-            <a:endParaRPr lang="en-US" sz="1300" dirty="0"/>
-          </a:p>
-        </p:txBody>
-      </p:sp>
-    </p:spTree>
-  </p:cSld>
-  <p:clrMapOvr>
-    <a:masterClrMapping/>
-  </p:clrMapOvr>
-</p:sld>
-</file>
-
-<file path=ppt/slides/slide41.xml><?xml version="1.0" encoding="utf-8"?>
-<p:sld xmlns:a="http://schemas.openxmlformats.org/drawingml/2006/main" xmlns:r="http://schemas.openxmlformats.org/officeDocument/2006/relationships" xmlns:p="http://schemas.openxmlformats.org/presentationml/2006/main">
   <p:cSld name="Slide 45">
     <p:bg>
       <p:bgPr>
@@ -35145,7 +33647,7 @@
 </p:sld>
 </file>
 
-<file path=ppt/slides/slide42.xml><?xml version="1.0" encoding="utf-8"?>
+<file path=ppt/slides/slide41.xml><?xml version="1.0" encoding="utf-8"?>
 <p:sld xmlns:a="http://schemas.openxmlformats.org/drawingml/2006/main" xmlns:r="http://schemas.openxmlformats.org/officeDocument/2006/relationships" xmlns:p="http://schemas.openxmlformats.org/presentationml/2006/main">
   <p:cSld name="Slide 31">
     <p:bg>
@@ -38018,7 +36520,7 @@
 </p:sld>
 </file>
 
-<file path=ppt/slides/slide43.xml><?xml version="1.0" encoding="utf-8"?>
+<file path=ppt/slides/slide42.xml><?xml version="1.0" encoding="utf-8"?>
 <p:sld xmlns:a="http://schemas.openxmlformats.org/drawingml/2006/main" xmlns:r="http://schemas.openxmlformats.org/officeDocument/2006/relationships" xmlns:p="http://schemas.openxmlformats.org/presentationml/2006/main">
   <p:cSld name="Slide 46">
     <p:bg>
@@ -38929,7 +37431,7 @@
 </p:sld>
 </file>
 
-<file path=ppt/slides/slide44.xml><?xml version="1.0" encoding="utf-8"?>
+<file path=ppt/slides/slide43.xml><?xml version="1.0" encoding="utf-8"?>
 <p:sld xmlns:a="http://schemas.openxmlformats.org/drawingml/2006/main" xmlns:r="http://schemas.openxmlformats.org/officeDocument/2006/relationships" xmlns:p="http://schemas.openxmlformats.org/presentationml/2006/main">
   <p:cSld name="Slide 47">
     <p:bg>
@@ -40868,7 +39370,7 @@
 </p:sld>
 </file>
 
-<file path=ppt/slides/slide45.xml><?xml version="1.0" encoding="utf-8"?>
+<file path=ppt/slides/slide44.xml><?xml version="1.0" encoding="utf-8"?>
 <p:sld xmlns:a="http://schemas.openxmlformats.org/drawingml/2006/main" xmlns:r="http://schemas.openxmlformats.org/officeDocument/2006/relationships" xmlns:p="http://schemas.openxmlformats.org/presentationml/2006/main">
   <p:cSld name="Slide 48">
     <p:bg>
@@ -41541,7 +40043,7 @@
 </p:sld>
 </file>
 
-<file path=ppt/slides/slide46.xml><?xml version="1.0" encoding="utf-8"?>
+<file path=ppt/slides/slide45.xml><?xml version="1.0" encoding="utf-8"?>
 <p:sld xmlns:a="http://schemas.openxmlformats.org/drawingml/2006/main" xmlns:r="http://schemas.openxmlformats.org/officeDocument/2006/relationships" xmlns:p="http://schemas.openxmlformats.org/presentationml/2006/main">
   <p:cSld name="Slide 49">
     <p:bg>
@@ -42042,7 +40544,7 @@
 </p:sld>
 </file>
 
-<file path=ppt/slides/slide47.xml><?xml version="1.0" encoding="utf-8"?>
+<file path=ppt/slides/slide46.xml><?xml version="1.0" encoding="utf-8"?>
 <p:sld xmlns:a="http://schemas.openxmlformats.org/drawingml/2006/main" xmlns:r="http://schemas.openxmlformats.org/officeDocument/2006/relationships" xmlns:p="http://schemas.openxmlformats.org/presentationml/2006/main">
   <p:cSld name="Slide 50">
     <p:bg>
@@ -43272,7 +41774,7 @@
 </p:sld>
 </file>
 
-<file path=ppt/slides/slide48.xml><?xml version="1.0" encoding="utf-8"?>
+<file path=ppt/slides/slide47.xml><?xml version="1.0" encoding="utf-8"?>
 <p:sld xmlns:a="http://schemas.openxmlformats.org/drawingml/2006/main" xmlns:r="http://schemas.openxmlformats.org/officeDocument/2006/relationships" xmlns:p="http://schemas.openxmlformats.org/presentationml/2006/main">
   <p:cSld name="Slide 51">
     <p:bg>
@@ -43745,7 +42247,7 @@
 </p:sld>
 </file>
 
-<file path=ppt/slides/slide49.xml><?xml version="1.0" encoding="utf-8"?>
+<file path=ppt/slides/slide48.xml><?xml version="1.0" encoding="utf-8"?>
 <p:sld xmlns:a="http://schemas.openxmlformats.org/drawingml/2006/main" xmlns:p="http://schemas.openxmlformats.org/presentationml/2006/main" xmlns:r="http://schemas.openxmlformats.org/officeDocument/2006/relationships">
   <p:cSld>
     <p:spTree>
@@ -45078,6 +43580,995 @@
                 <a:latin typeface="Calibri"/>
               </a:rPr>
               <a:t>speed / feed / tool no.</a:t>
+            </a:r>
+          </a:p>
+        </p:txBody>
+      </p:sp>
+    </p:spTree>
+  </p:cSld>
+  <p:clrMapOvr>
+    <a:masterClrMapping/>
+  </p:clrMapOvr>
+</p:sld>
+</file>
+
+<file path=ppt/slides/slide49.xml><?xml version="1.0" encoding="utf-8"?>
+<p:sld xmlns:a="http://schemas.openxmlformats.org/drawingml/2006/main" xmlns:p="http://schemas.openxmlformats.org/presentationml/2006/main" xmlns:r="http://schemas.openxmlformats.org/officeDocument/2006/relationships">
+  <p:cSld>
+    <p:spTree>
+      <p:nvGrpSpPr>
+        <p:cNvPr id="1" name=""/>
+        <p:cNvGrpSpPr/>
+        <p:nvPr/>
+      </p:nvGrpSpPr>
+      <p:grpSpPr/>
+      <p:sp>
+        <p:nvSpPr>
+          <p:cNvPr id="2" name="Rounded Rectangle 1"/>
+          <p:cNvSpPr/>
+          <p:nvPr/>
+        </p:nvSpPr>
+        <p:spPr>
+          <a:xfrm>
+            <a:off x="502920" y="411480"/>
+            <a:ext cx="757123" cy="310896"/>
+          </a:xfrm>
+          <a:prstGeom prst="roundRect">
+            <a:avLst>
+              <a:gd name="adj" fmla="val 50000"/>
+            </a:avLst>
+          </a:prstGeom>
+          <a:solidFill>
+            <a:srgbClr val="D97706"/>
+          </a:solidFill>
+          <a:ln>
+            <a:noFill/>
+          </a:ln>
+          <a:effectLst/>
+        </p:spPr>
+        <p:style>
+          <a:lnRef idx="1">
+            <a:schemeClr val="accent1"/>
+          </a:lnRef>
+          <a:fillRef idx="3">
+            <a:schemeClr val="accent1"/>
+          </a:fillRef>
+          <a:effectRef idx="2">
+            <a:schemeClr val="accent1"/>
+          </a:effectRef>
+          <a:fontRef idx="minor">
+            <a:schemeClr val="lt1"/>
+          </a:fontRef>
+        </p:style>
+        <p:txBody>
+          <a:bodyPr rtlCol="0" anchor="ctr" lIns="0" rIns="0" tIns="0" bIns="0"/>
+          <a:lstStyle/>
+          <a:p>
+            <a:pPr algn="ctr"/>
+            <a:r>
+              <a:rPr sz="1050" b="1" i="0">
+                <a:solidFill>
+                  <a:srgbClr val="FFFFFF"/>
+                </a:solidFill>
+                <a:latin typeface="Calibri"/>
+              </a:rPr>
+              <a:t>UNIT 3</a:t>
+            </a:r>
+          </a:p>
+        </p:txBody>
+      </p:sp>
+      <p:sp>
+        <p:nvSpPr>
+          <p:cNvPr id="3" name="TextBox 2"/>
+          <p:cNvSpPr txBox="1"/>
+          <p:nvPr/>
+        </p:nvSpPr>
+        <p:spPr>
+          <a:xfrm>
+            <a:off x="502920" y="768096"/>
+            <a:ext cx="11155680" cy="603504"/>
+          </a:xfrm>
+          <a:prstGeom prst="rect">
+            <a:avLst/>
+          </a:prstGeom>
+          <a:noFill/>
+        </p:spPr>
+        <p:txBody>
+          <a:bodyPr wrap="square" anchor="ctr" lIns="0" rIns="0" tIns="0" bIns="0">
+            <a:spAutoFit/>
+          </a:bodyPr>
+          <a:lstStyle/>
+          <a:p>
+            <a:r>
+              <a:rPr sz="2600" b="1" i="0">
+                <a:solidFill>
+                  <a:srgbClr val="0F2942"/>
+                </a:solidFill>
+                <a:latin typeface="Cambria"/>
+              </a:rPr>
+              <a:t>Working with G-code</a:t>
+            </a:r>
+          </a:p>
+        </p:txBody>
+      </p:sp>
+      <p:sp>
+        <p:nvSpPr>
+          <p:cNvPr id="4" name="TextBox 3"/>
+          <p:cNvSpPr txBox="1"/>
+          <p:nvPr/>
+        </p:nvSpPr>
+        <p:spPr>
+          <a:xfrm>
+            <a:off x="502920" y="1298448"/>
+            <a:ext cx="11155680" cy="365760"/>
+          </a:xfrm>
+          <a:prstGeom prst="rect">
+            <a:avLst/>
+          </a:prstGeom>
+          <a:noFill/>
+        </p:spPr>
+        <p:txBody>
+          <a:bodyPr wrap="square" anchor="ctr" lIns="0" rIns="0" tIns="0" bIns="0">
+            <a:spAutoFit/>
+          </a:bodyPr>
+          <a:lstStyle/>
+          <a:p>
+            <a:r>
+              <a:rPr sz="1250" b="0" i="1">
+                <a:solidFill>
+                  <a:srgbClr val="8592A3"/>
+                </a:solidFill>
+                <a:latin typeface="Calibri"/>
+              </a:rPr>
+              <a:t>Small edits at the edges of a program are routine — editing the geometry in the middle is CAM's job.</a:t>
+            </a:r>
+          </a:p>
+        </p:txBody>
+      </p:sp>
+      <p:sp>
+        <p:nvSpPr>
+          <p:cNvPr id="5" name="TextBox 4"/>
+          <p:cNvSpPr txBox="1"/>
+          <p:nvPr/>
+        </p:nvSpPr>
+        <p:spPr>
+          <a:xfrm>
+            <a:off x="502920" y="6565392"/>
+            <a:ext cx="9000000" cy="256032"/>
+          </a:xfrm>
+          <a:prstGeom prst="rect">
+            <a:avLst/>
+          </a:prstGeom>
+          <a:noFill/>
+        </p:spPr>
+        <p:txBody>
+          <a:bodyPr wrap="square" anchor="ctr" lIns="0" rIns="0" tIns="0" bIns="0">
+            <a:spAutoFit/>
+          </a:bodyPr>
+          <a:lstStyle/>
+          <a:p>
+            <a:r>
+              <a:rPr sz="850" b="0" i="0">
+                <a:solidFill>
+                  <a:srgbClr val="8592A3"/>
+                </a:solidFill>
+                <a:latin typeface="Calibri"/>
+              </a:rPr>
+              <a:t>MECH 151 · Technical Design — Unit Reference Guide</a:t>
+            </a:r>
+          </a:p>
+        </p:txBody>
+      </p:sp>
+      <p:sp>
+        <p:nvSpPr>
+          <p:cNvPr id="6" name="TextBox 5"/>
+          <p:cNvSpPr txBox="1"/>
+          <p:nvPr/>
+        </p:nvSpPr>
+        <p:spPr>
+          <a:xfrm>
+            <a:off x="502920" y="1902240"/>
+            <a:ext cx="6035040" cy="219456"/>
+          </a:xfrm>
+          <a:prstGeom prst="rect">
+            <a:avLst/>
+          </a:prstGeom>
+          <a:noFill/>
+        </p:spPr>
+        <p:txBody>
+          <a:bodyPr wrap="square" anchor="ctr" lIns="0" rIns="0" tIns="0" bIns="0">
+            <a:spAutoFit/>
+          </a:bodyPr>
+          <a:lstStyle/>
+          <a:p>
+            <a:r>
+              <a:rPr sz="1150" b="1" i="1">
+                <a:solidFill>
+                  <a:srgbClr val="8592A3"/>
+                </a:solidFill>
+                <a:latin typeface="Calibri"/>
+              </a:rPr>
+              <a:t>A short program, annotated</a:t>
+            </a:r>
+          </a:p>
+        </p:txBody>
+      </p:sp>
+      <p:sp>
+        <p:nvSpPr>
+          <p:cNvPr id="7" name="Rounded Rectangle 6"/>
+          <p:cNvSpPr/>
+          <p:nvPr/>
+        </p:nvSpPr>
+        <p:spPr>
+          <a:xfrm>
+            <a:off x="502920" y="2176560"/>
+            <a:ext cx="6035040" cy="3247320"/>
+          </a:xfrm>
+          <a:prstGeom prst="roundRect">
+            <a:avLst>
+              <a:gd name="adj" fmla="val 3500"/>
+            </a:avLst>
+          </a:prstGeom>
+          <a:solidFill>
+            <a:srgbClr val="F3F6F9"/>
+          </a:solidFill>
+          <a:ln w="12700">
+            <a:solidFill>
+              <a:srgbClr val="E1E7EE"/>
+            </a:solidFill>
+          </a:ln>
+          <a:effectLst/>
+        </p:spPr>
+        <p:style>
+          <a:lnRef idx="1">
+            <a:schemeClr val="accent1"/>
+          </a:lnRef>
+          <a:fillRef idx="3">
+            <a:schemeClr val="accent1"/>
+          </a:fillRef>
+          <a:effectRef idx="2">
+            <a:schemeClr val="accent1"/>
+          </a:effectRef>
+          <a:fontRef idx="minor">
+            <a:schemeClr val="lt1"/>
+          </a:fontRef>
+        </p:style>
+        <p:txBody>
+          <a:bodyPr rtlCol="0" anchor="ctr"/>
+          <a:lstStyle/>
+          <a:p>
+            <a:pPr algn="ctr"/>
+          </a:p>
+        </p:txBody>
+      </p:sp>
+      <p:sp>
+        <p:nvSpPr>
+          <p:cNvPr id="8" name="TextBox 7"/>
+          <p:cNvSpPr txBox="1"/>
+          <p:nvPr/>
+        </p:nvSpPr>
+        <p:spPr>
+          <a:xfrm>
+            <a:off x="822920" y="2436560"/>
+            <a:ext cx="5475040" cy="2787320"/>
+          </a:xfrm>
+          <a:prstGeom prst="rect">
+            <a:avLst/>
+          </a:prstGeom>
+          <a:noFill/>
+        </p:spPr>
+        <p:txBody>
+          <a:bodyPr wrap="square" anchor="t" lIns="0" rIns="0" tIns="0" bIns="0">
+            <a:spAutoFit/>
+          </a:bodyPr>
+          <a:lstStyle/>
+          <a:p>
+            <a:pPr>
+              <a:lnSpc>
+                <a:spcPct val="115000"/>
+              </a:lnSpc>
+              <a:spcAft>
+                <a:spcPts val="400"/>
+              </a:spcAft>
+            </a:pPr>
+            <a:r>
+              <a:rPr sz="1000" b="0" i="1">
+                <a:solidFill>
+                  <a:srgbClr val="8592A3"/>
+                </a:solidFill>
+                <a:latin typeface="Consolas"/>
+              </a:rPr>
+              <a:t>(SLOT — 6MM 2-FLUTE ENDMILL)</a:t>
+            </a:r>
+          </a:p>
+          <a:p>
+            <a:pPr>
+              <a:lnSpc>
+                <a:spcPct val="115000"/>
+              </a:lnSpc>
+              <a:spcAft>
+                <a:spcPts val="400"/>
+              </a:spcAft>
+            </a:pPr>
+            <a:r>
+              <a:rPr sz="1000" b="1" i="0">
+                <a:solidFill>
+                  <a:srgbClr val="0F2942"/>
+                </a:solidFill>
+                <a:latin typeface="Consolas"/>
+              </a:rPr>
+              <a:t>G21 G90 G17    </a:t>
+            </a:r>
+            <a:r>
+              <a:rPr sz="1000" b="0" i="0">
+                <a:solidFill>
+                  <a:srgbClr val="8592A3"/>
+                </a:solidFill>
+                <a:latin typeface="Consolas"/>
+              </a:rPr>
+              <a:t>mm, absolute, XY plane</a:t>
+            </a:r>
+          </a:p>
+          <a:p>
+            <a:pPr>
+              <a:lnSpc>
+                <a:spcPct val="115000"/>
+              </a:lnSpc>
+              <a:spcAft>
+                <a:spcPts val="400"/>
+              </a:spcAft>
+            </a:pPr>
+            <a:r>
+              <a:rPr sz="1000" b="1" i="0">
+                <a:solidFill>
+                  <a:srgbClr val="0F2942"/>
+                </a:solidFill>
+                <a:latin typeface="Consolas"/>
+              </a:rPr>
+              <a:t>G54            </a:t>
+            </a:r>
+            <a:r>
+              <a:rPr sz="1000" b="0" i="0">
+                <a:solidFill>
+                  <a:srgbClr val="8592A3"/>
+                </a:solidFill>
+                <a:latin typeface="Consolas"/>
+              </a:rPr>
+              <a:t>work offset = part zero</a:t>
+            </a:r>
+          </a:p>
+          <a:p>
+            <a:pPr>
+              <a:lnSpc>
+                <a:spcPct val="115000"/>
+              </a:lnSpc>
+              <a:spcAft>
+                <a:spcPts val="400"/>
+              </a:spcAft>
+            </a:pPr>
+            <a:r>
+              <a:rPr sz="1000" b="1" i="0">
+                <a:solidFill>
+                  <a:srgbClr val="0F2942"/>
+                </a:solidFill>
+                <a:latin typeface="Consolas"/>
+              </a:rPr>
+              <a:t>G0 Z5.0        </a:t>
+            </a:r>
+            <a:r>
+              <a:rPr sz="1000" b="0" i="0">
+                <a:solidFill>
+                  <a:srgbClr val="8592A3"/>
+                </a:solidFill>
+                <a:latin typeface="Consolas"/>
+              </a:rPr>
+              <a:t>rapid to safe height</a:t>
+            </a:r>
+          </a:p>
+          <a:p>
+            <a:pPr>
+              <a:lnSpc>
+                <a:spcPct val="115000"/>
+              </a:lnSpc>
+              <a:spcAft>
+                <a:spcPts val="400"/>
+              </a:spcAft>
+            </a:pPr>
+            <a:r>
+              <a:rPr sz="1000" b="1" i="0">
+                <a:solidFill>
+                  <a:srgbClr val="0F2942"/>
+                </a:solidFill>
+                <a:latin typeface="Consolas"/>
+              </a:rPr>
+              <a:t>M3 S10600      </a:t>
+            </a:r>
+            <a:r>
+              <a:rPr sz="1000" b="0" i="0">
+                <a:solidFill>
+                  <a:srgbClr val="8592A3"/>
+                </a:solidFill>
+                <a:latin typeface="Consolas"/>
+              </a:rPr>
+              <a:t>spindle on CW, 10600 rpm</a:t>
+            </a:r>
+          </a:p>
+          <a:p>
+            <a:pPr>
+              <a:lnSpc>
+                <a:spcPct val="115000"/>
+              </a:lnSpc>
+              <a:spcAft>
+                <a:spcPts val="400"/>
+              </a:spcAft>
+            </a:pPr>
+            <a:r>
+              <a:rPr sz="1000" b="1" i="0">
+                <a:solidFill>
+                  <a:srgbClr val="0F2942"/>
+                </a:solidFill>
+                <a:latin typeface="Consolas"/>
+              </a:rPr>
+              <a:t>G0 X0 Y0       </a:t>
+            </a:r>
+            <a:r>
+              <a:rPr sz="1000" b="0" i="0">
+                <a:solidFill>
+                  <a:srgbClr val="8592A3"/>
+                </a:solidFill>
+                <a:latin typeface="Consolas"/>
+              </a:rPr>
+              <a:t>rapid above the start</a:t>
+            </a:r>
+          </a:p>
+          <a:p>
+            <a:pPr>
+              <a:lnSpc>
+                <a:spcPct val="115000"/>
+              </a:lnSpc>
+              <a:spcAft>
+                <a:spcPts val="400"/>
+              </a:spcAft>
+            </a:pPr>
+            <a:r>
+              <a:rPr sz="1000" b="1" i="0">
+                <a:solidFill>
+                  <a:srgbClr val="0F2942"/>
+                </a:solidFill>
+                <a:latin typeface="Consolas"/>
+              </a:rPr>
+              <a:t>G1 Z-2.0 F300  </a:t>
+            </a:r>
+            <a:r>
+              <a:rPr sz="1000" b="0" i="0">
+                <a:solidFill>
+                  <a:srgbClr val="8592A3"/>
+                </a:solidFill>
+                <a:latin typeface="Consolas"/>
+              </a:rPr>
+              <a:t>feed down to depth</a:t>
+            </a:r>
+          </a:p>
+          <a:p>
+            <a:pPr>
+              <a:lnSpc>
+                <a:spcPct val="115000"/>
+              </a:lnSpc>
+              <a:spcAft>
+                <a:spcPts val="400"/>
+              </a:spcAft>
+            </a:pPr>
+            <a:r>
+              <a:rPr sz="1000" b="1" i="0">
+                <a:solidFill>
+                  <a:srgbClr val="0F2942"/>
+                </a:solidFill>
+                <a:latin typeface="Consolas"/>
+              </a:rPr>
+              <a:t>G1 X50.0 F640  </a:t>
+            </a:r>
+            <a:r>
+              <a:rPr sz="1000" b="0" i="0">
+                <a:solidFill>
+                  <a:srgbClr val="8592A3"/>
+                </a:solidFill>
+                <a:latin typeface="Consolas"/>
+              </a:rPr>
+              <a:t>cut the slot at feed</a:t>
+            </a:r>
+          </a:p>
+          <a:p>
+            <a:pPr>
+              <a:lnSpc>
+                <a:spcPct val="115000"/>
+              </a:lnSpc>
+              <a:spcAft>
+                <a:spcPts val="400"/>
+              </a:spcAft>
+            </a:pPr>
+            <a:r>
+              <a:rPr sz="1000" b="1" i="0">
+                <a:solidFill>
+                  <a:srgbClr val="0F2942"/>
+                </a:solidFill>
+                <a:latin typeface="Consolas"/>
+              </a:rPr>
+              <a:t>G0 Z5.0        </a:t>
+            </a:r>
+            <a:r>
+              <a:rPr sz="1000" b="0" i="0">
+                <a:solidFill>
+                  <a:srgbClr val="8592A3"/>
+                </a:solidFill>
+                <a:latin typeface="Consolas"/>
+              </a:rPr>
+              <a:t>retract</a:t>
+            </a:r>
+          </a:p>
+          <a:p>
+            <a:pPr>
+              <a:lnSpc>
+                <a:spcPct val="115000"/>
+              </a:lnSpc>
+              <a:spcAft>
+                <a:spcPts val="400"/>
+              </a:spcAft>
+            </a:pPr>
+            <a:r>
+              <a:rPr sz="1000" b="1" i="0">
+                <a:solidFill>
+                  <a:srgbClr val="0F2942"/>
+                </a:solidFill>
+                <a:latin typeface="Consolas"/>
+              </a:rPr>
+              <a:t>M5             </a:t>
+            </a:r>
+            <a:r>
+              <a:rPr sz="1000" b="0" i="0">
+                <a:solidFill>
+                  <a:srgbClr val="8592A3"/>
+                </a:solidFill>
+                <a:latin typeface="Consolas"/>
+              </a:rPr>
+              <a:t>spindle off</a:t>
+            </a:r>
+          </a:p>
+          <a:p>
+            <a:pPr>
+              <a:lnSpc>
+                <a:spcPct val="115000"/>
+              </a:lnSpc>
+              <a:spcAft>
+                <a:spcPts val="400"/>
+              </a:spcAft>
+            </a:pPr>
+            <a:r>
+              <a:rPr sz="1000" b="1" i="0">
+                <a:solidFill>
+                  <a:srgbClr val="0F2942"/>
+                </a:solidFill>
+                <a:latin typeface="Consolas"/>
+              </a:rPr>
+              <a:t>M30            </a:t>
+            </a:r>
+            <a:r>
+              <a:rPr sz="1000" b="0" i="0">
+                <a:solidFill>
+                  <a:srgbClr val="8592A3"/>
+                </a:solidFill>
+                <a:latin typeface="Consolas"/>
+              </a:rPr>
+              <a:t>end of program</a:t>
+            </a:r>
+          </a:p>
+        </p:txBody>
+      </p:sp>
+      <p:sp>
+        <p:nvSpPr>
+          <p:cNvPr id="9" name="Rounded Rectangle 8"/>
+          <p:cNvSpPr/>
+          <p:nvPr/>
+        </p:nvSpPr>
+        <p:spPr>
+          <a:xfrm>
+            <a:off x="6748920" y="2176560"/>
+            <a:ext cx="4954680" cy="1783080"/>
+          </a:xfrm>
+          <a:prstGeom prst="roundRect">
+            <a:avLst>
+              <a:gd name="adj" fmla="val 4500"/>
+            </a:avLst>
+          </a:prstGeom>
+          <a:solidFill>
+            <a:srgbClr val="F3F6F9"/>
+          </a:solidFill>
+          <a:ln w="15875">
+            <a:solidFill>
+              <a:srgbClr val="1B8A8A"/>
+            </a:solidFill>
+          </a:ln>
+          <a:effectLst/>
+        </p:spPr>
+        <p:style>
+          <a:lnRef idx="1">
+            <a:schemeClr val="accent1"/>
+          </a:lnRef>
+          <a:fillRef idx="3">
+            <a:schemeClr val="accent1"/>
+          </a:fillRef>
+          <a:effectRef idx="2">
+            <a:schemeClr val="accent1"/>
+          </a:effectRef>
+          <a:fontRef idx="minor">
+            <a:schemeClr val="lt1"/>
+          </a:fontRef>
+        </p:style>
+        <p:txBody>
+          <a:bodyPr rtlCol="0" anchor="ctr"/>
+          <a:lstStyle/>
+          <a:p>
+            <a:pPr algn="ctr"/>
+          </a:p>
+        </p:txBody>
+      </p:sp>
+      <p:sp>
+        <p:nvSpPr>
+          <p:cNvPr id="10" name="TextBox 9"/>
+          <p:cNvSpPr txBox="1"/>
+          <p:nvPr/>
+        </p:nvSpPr>
+        <p:spPr>
+          <a:xfrm>
+            <a:off x="6977520" y="2340000"/>
+            <a:ext cx="4497480" cy="1560000"/>
+          </a:xfrm>
+          <a:prstGeom prst="rect">
+            <a:avLst/>
+          </a:prstGeom>
+          <a:noFill/>
+        </p:spPr>
+        <p:txBody>
+          <a:bodyPr wrap="square" anchor="t" lIns="0" rIns="0" tIns="0" bIns="0">
+            <a:spAutoFit/>
+          </a:bodyPr>
+          <a:lstStyle/>
+          <a:p>
+            <a:pPr>
+              <a:spcAft>
+                <a:spcPts val="500"/>
+              </a:spcAft>
+            </a:pPr>
+            <a:r>
+              <a:rPr sz="1400" b="1" i="0">
+                <a:solidFill>
+                  <a:srgbClr val="1B8A8A"/>
+                </a:solidFill>
+                <a:latin typeface="Cambria"/>
+              </a:rPr>
+              <a:t>Safe to edit by hand</a:t>
+            </a:r>
+          </a:p>
+          <a:p>
+            <a:pPr marL="274320" indent="-274320">
+              <a:lnSpc>
+                <a:spcPct val="105000"/>
+              </a:lnSpc>
+              <a:spcAft>
+                <a:spcPts val="350"/>
+              </a:spcAft>
+              <a:buChar char="●"/>
+            </a:pPr>
+            <a:r>
+              <a:rPr sz="1000" b="0" i="0">
+                <a:solidFill>
+                  <a:srgbClr val="44536B"/>
+                </a:solidFill>
+                <a:latin typeface="Calibri"/>
+              </a:rPr>
+              <a:t>Feed (F) and spindle speed (S) — ease off for chatter or burning</a:t>
+            </a:r>
+          </a:p>
+          <a:p>
+            <a:pPr marL="274320" indent="-274320">
+              <a:lnSpc>
+                <a:spcPct val="105000"/>
+              </a:lnSpc>
+              <a:spcAft>
+                <a:spcPts val="350"/>
+              </a:spcAft>
+              <a:buChar char="●"/>
+            </a:pPr>
+            <a:r>
+              <a:rPr sz="1000" b="0" i="0">
+                <a:solidFill>
+                  <a:srgbClr val="44536B"/>
+                </a:solidFill>
+                <a:latin typeface="Calibri"/>
+              </a:rPr>
+              <a:t>Safe / clearance Z heights — after checking nothing is taller</a:t>
+            </a:r>
+          </a:p>
+          <a:p>
+            <a:pPr marL="274320" indent="-274320">
+              <a:lnSpc>
+                <a:spcPct val="105000"/>
+              </a:lnSpc>
+              <a:spcAft>
+                <a:spcPts val="350"/>
+              </a:spcAft>
+              <a:buChar char="●"/>
+            </a:pPr>
+            <a:r>
+              <a:rPr sz="1000" b="0" i="0">
+                <a:solidFill>
+                  <a:srgbClr val="44536B"/>
+                </a:solidFill>
+                <a:latin typeface="Calibri"/>
+              </a:rPr>
+              <a:t>Work offset (G54→G55); add a pause (M00) or dwell (G04)</a:t>
+            </a:r>
+          </a:p>
+          <a:p>
+            <a:pPr marL="274320" indent="-274320">
+              <a:lnSpc>
+                <a:spcPct val="105000"/>
+              </a:lnSpc>
+              <a:spcAft>
+                <a:spcPts val="350"/>
+              </a:spcAft>
+              <a:buChar char="●"/>
+            </a:pPr>
+            <a:r>
+              <a:rPr sz="1000" b="0" i="0">
+                <a:solidFill>
+                  <a:srgbClr val="44536B"/>
+                </a:solidFill>
+                <a:latin typeface="Calibri"/>
+              </a:rPr>
+              <a:t>Trim header/footer lines your machine doesn't use; drop an unused tool section</a:t>
+            </a:r>
+          </a:p>
+        </p:txBody>
+      </p:sp>
+      <p:sp>
+        <p:nvSpPr>
+          <p:cNvPr id="11" name="Rounded Rectangle 10"/>
+          <p:cNvSpPr/>
+          <p:nvPr/>
+        </p:nvSpPr>
+        <p:spPr>
+          <a:xfrm>
+            <a:off x="6748920" y="4133088"/>
+            <a:ext cx="4954680" cy="1430000"/>
+          </a:xfrm>
+          <a:prstGeom prst="roundRect">
+            <a:avLst>
+              <a:gd name="adj" fmla="val 4500"/>
+            </a:avLst>
+          </a:prstGeom>
+          <a:solidFill>
+            <a:srgbClr val="F3F6F9"/>
+          </a:solidFill>
+          <a:ln w="15875">
+            <a:solidFill>
+              <a:srgbClr val="C0392B"/>
+            </a:solidFill>
+          </a:ln>
+          <a:effectLst/>
+        </p:spPr>
+        <p:style>
+          <a:lnRef idx="1">
+            <a:schemeClr val="accent1"/>
+          </a:lnRef>
+          <a:fillRef idx="3">
+            <a:schemeClr val="accent1"/>
+          </a:fillRef>
+          <a:effectRef idx="2">
+            <a:schemeClr val="accent1"/>
+          </a:effectRef>
+          <a:fontRef idx="minor">
+            <a:schemeClr val="lt1"/>
+          </a:fontRef>
+        </p:style>
+        <p:txBody>
+          <a:bodyPr rtlCol="0" anchor="ctr"/>
+          <a:lstStyle/>
+          <a:p>
+            <a:pPr algn="ctr"/>
+          </a:p>
+        </p:txBody>
+      </p:sp>
+      <p:sp>
+        <p:nvSpPr>
+          <p:cNvPr id="12" name="TextBox 11"/>
+          <p:cNvSpPr txBox="1"/>
+          <p:nvPr/>
+        </p:nvSpPr>
+        <p:spPr>
+          <a:xfrm>
+            <a:off x="6977520" y="4286040"/>
+            <a:ext cx="4497480" cy="1230000"/>
+          </a:xfrm>
+          <a:prstGeom prst="rect">
+            <a:avLst/>
+          </a:prstGeom>
+          <a:noFill/>
+        </p:spPr>
+        <p:txBody>
+          <a:bodyPr wrap="square" anchor="t" lIns="0" rIns="0" tIns="0" bIns="0">
+            <a:spAutoFit/>
+          </a:bodyPr>
+          <a:lstStyle/>
+          <a:p>
+            <a:pPr>
+              <a:spcAft>
+                <a:spcPts val="500"/>
+              </a:spcAft>
+            </a:pPr>
+            <a:r>
+              <a:rPr sz="1400" b="1" i="0">
+                <a:solidFill>
+                  <a:srgbClr val="C0392B"/>
+                </a:solidFill>
+                <a:latin typeface="Cambria"/>
+              </a:rPr>
+              <a:t>Regenerate from CAM — don't hand-edit</a:t>
+            </a:r>
+          </a:p>
+          <a:p>
+            <a:pPr marL="274320" indent="-274320">
+              <a:lnSpc>
+                <a:spcPct val="105000"/>
+              </a:lnSpc>
+              <a:spcAft>
+                <a:spcPts val="350"/>
+              </a:spcAft>
+              <a:buChar char="●"/>
+            </a:pPr>
+            <a:r>
+              <a:rPr sz="1000" b="0" i="0">
+                <a:solidFill>
+                  <a:srgbClr val="44536B"/>
+                </a:solidFill>
+                <a:latin typeface="Calibri"/>
+              </a:rPr>
+              <a:t>Individual X / Y / Z cutting values, or arc I / J centres</a:t>
+            </a:r>
+          </a:p>
+          <a:p>
+            <a:pPr marL="274320" indent="-274320">
+              <a:lnSpc>
+                <a:spcPct val="105000"/>
+              </a:lnSpc>
+              <a:spcAft>
+                <a:spcPts val="350"/>
+              </a:spcAft>
+              <a:buChar char="●"/>
+            </a:pPr>
+            <a:r>
+              <a:rPr sz="1000" b="0" i="0">
+                <a:solidFill>
+                  <a:srgbClr val="44536B"/>
+                </a:solidFill>
+                <a:latin typeface="Calibri"/>
+              </a:rPr>
+              <a:t>Switching units (G20 ↔ G21) partway through</a:t>
+            </a:r>
+          </a:p>
+          <a:p>
+            <a:pPr marL="274320" indent="-274320">
+              <a:lnSpc>
+                <a:spcPct val="105000"/>
+              </a:lnSpc>
+              <a:spcAft>
+                <a:spcPts val="350"/>
+              </a:spcAft>
+              <a:buChar char="●"/>
+            </a:pPr>
+            <a:r>
+              <a:rPr sz="1000" b="0" i="0">
+                <a:solidFill>
+                  <a:srgbClr val="44536B"/>
+                </a:solidFill>
+                <a:latin typeface="Calibri"/>
+              </a:rPr>
+              <a:t>Cutter compensation (G41 / G42) offsets</a:t>
+            </a:r>
+          </a:p>
+        </p:txBody>
+      </p:sp>
+      <p:sp>
+        <p:nvSpPr>
+          <p:cNvPr id="13" name="Rounded Rectangle 12"/>
+          <p:cNvSpPr/>
+          <p:nvPr/>
+        </p:nvSpPr>
+        <p:spPr>
+          <a:xfrm>
+            <a:off x="502920" y="5989320"/>
+            <a:ext cx="11201400" cy="466344"/>
+          </a:xfrm>
+          <a:prstGeom prst="roundRect">
+            <a:avLst>
+              <a:gd name="adj" fmla="val 14000"/>
+            </a:avLst>
+          </a:prstGeom>
+          <a:solidFill>
+            <a:srgbClr val="F3F6F9"/>
+          </a:solidFill>
+          <a:ln w="15875">
+            <a:solidFill>
+              <a:srgbClr val="C0392B"/>
+            </a:solidFill>
+          </a:ln>
+          <a:effectLst/>
+        </p:spPr>
+        <p:style>
+          <a:lnRef idx="1">
+            <a:schemeClr val="accent1"/>
+          </a:lnRef>
+          <a:fillRef idx="3">
+            <a:schemeClr val="accent1"/>
+          </a:fillRef>
+          <a:effectRef idx="2">
+            <a:schemeClr val="accent1"/>
+          </a:effectRef>
+          <a:fontRef idx="minor">
+            <a:schemeClr val="lt1"/>
+          </a:fontRef>
+        </p:style>
+        <p:txBody>
+          <a:bodyPr rtlCol="0" anchor="ctr"/>
+          <a:lstStyle/>
+          <a:p>
+            <a:pPr algn="ctr"/>
+          </a:p>
+        </p:txBody>
+      </p:sp>
+      <p:sp>
+        <p:nvSpPr>
+          <p:cNvPr id="14" name="TextBox 13"/>
+          <p:cNvSpPr txBox="1"/>
+          <p:nvPr/>
+        </p:nvSpPr>
+        <p:spPr>
+          <a:xfrm>
+            <a:off x="731520" y="5989320"/>
+            <a:ext cx="10744200" cy="466344"/>
+          </a:xfrm>
+          <a:prstGeom prst="rect">
+            <a:avLst/>
+          </a:prstGeom>
+          <a:noFill/>
+        </p:spPr>
+        <p:txBody>
+          <a:bodyPr wrap="square" anchor="ctr" lIns="0" rIns="0" tIns="0" bIns="0">
+            <a:spAutoFit/>
+          </a:bodyPr>
+          <a:lstStyle/>
+          <a:p>
+            <a:pPr>
+              <a:lnSpc>
+                <a:spcPct val="112000"/>
+              </a:lnSpc>
+            </a:pPr>
+            <a:r>
+              <a:rPr sz="1200" b="1" i="0">
+                <a:solidFill>
+                  <a:srgbClr val="C0392B"/>
+                </a:solidFill>
+                <a:latin typeface="Calibri"/>
+              </a:rPr>
+              <a:t>Prove it before it cuts:  </a:t>
+            </a:r>
+            <a:r>
+              <a:rPr sz="1200" b="0" i="0">
+                <a:solidFill>
+                  <a:srgbClr val="44536B"/>
+                </a:solidFill>
+                <a:latin typeface="Calibri"/>
+              </a:rPr>
+              <a:t>re-simulate the whole program, then run it once as an air pass with a hand on the feed-hold — a G-code error is found by the machine at full speed.</a:t>
             </a:r>
           </a:p>
         </p:txBody>
@@ -46042,995 +45533,6 @@
 </file>
 
 <file path=ppt/slides/slide50.xml><?xml version="1.0" encoding="utf-8"?>
-<p:sld xmlns:a="http://schemas.openxmlformats.org/drawingml/2006/main" xmlns:p="http://schemas.openxmlformats.org/presentationml/2006/main" xmlns:r="http://schemas.openxmlformats.org/officeDocument/2006/relationships">
-  <p:cSld>
-    <p:spTree>
-      <p:nvGrpSpPr>
-        <p:cNvPr id="1" name=""/>
-        <p:cNvGrpSpPr/>
-        <p:nvPr/>
-      </p:nvGrpSpPr>
-      <p:grpSpPr/>
-      <p:sp>
-        <p:nvSpPr>
-          <p:cNvPr id="2" name="Rounded Rectangle 1"/>
-          <p:cNvSpPr/>
-          <p:nvPr/>
-        </p:nvSpPr>
-        <p:spPr>
-          <a:xfrm>
-            <a:off x="502920" y="411480"/>
-            <a:ext cx="757123" cy="310896"/>
-          </a:xfrm>
-          <a:prstGeom prst="roundRect">
-            <a:avLst>
-              <a:gd name="adj" fmla="val 50000"/>
-            </a:avLst>
-          </a:prstGeom>
-          <a:solidFill>
-            <a:srgbClr val="D97706"/>
-          </a:solidFill>
-          <a:ln>
-            <a:noFill/>
-          </a:ln>
-          <a:effectLst/>
-        </p:spPr>
-        <p:style>
-          <a:lnRef idx="1">
-            <a:schemeClr val="accent1"/>
-          </a:lnRef>
-          <a:fillRef idx="3">
-            <a:schemeClr val="accent1"/>
-          </a:fillRef>
-          <a:effectRef idx="2">
-            <a:schemeClr val="accent1"/>
-          </a:effectRef>
-          <a:fontRef idx="minor">
-            <a:schemeClr val="lt1"/>
-          </a:fontRef>
-        </p:style>
-        <p:txBody>
-          <a:bodyPr rtlCol="0" anchor="ctr" lIns="0" rIns="0" tIns="0" bIns="0"/>
-          <a:lstStyle/>
-          <a:p>
-            <a:pPr algn="ctr"/>
-            <a:r>
-              <a:rPr sz="1050" b="1" i="0">
-                <a:solidFill>
-                  <a:srgbClr val="FFFFFF"/>
-                </a:solidFill>
-                <a:latin typeface="Calibri"/>
-              </a:rPr>
-              <a:t>UNIT 3</a:t>
-            </a:r>
-          </a:p>
-        </p:txBody>
-      </p:sp>
-      <p:sp>
-        <p:nvSpPr>
-          <p:cNvPr id="3" name="TextBox 2"/>
-          <p:cNvSpPr txBox="1"/>
-          <p:nvPr/>
-        </p:nvSpPr>
-        <p:spPr>
-          <a:xfrm>
-            <a:off x="502920" y="768096"/>
-            <a:ext cx="11155680" cy="603504"/>
-          </a:xfrm>
-          <a:prstGeom prst="rect">
-            <a:avLst/>
-          </a:prstGeom>
-          <a:noFill/>
-        </p:spPr>
-        <p:txBody>
-          <a:bodyPr wrap="square" anchor="ctr" lIns="0" rIns="0" tIns="0" bIns="0">
-            <a:spAutoFit/>
-          </a:bodyPr>
-          <a:lstStyle/>
-          <a:p>
-            <a:r>
-              <a:rPr sz="2600" b="1" i="0">
-                <a:solidFill>
-                  <a:srgbClr val="0F2942"/>
-                </a:solidFill>
-                <a:latin typeface="Cambria"/>
-              </a:rPr>
-              <a:t>Working with G-code</a:t>
-            </a:r>
-          </a:p>
-        </p:txBody>
-      </p:sp>
-      <p:sp>
-        <p:nvSpPr>
-          <p:cNvPr id="4" name="TextBox 3"/>
-          <p:cNvSpPr txBox="1"/>
-          <p:nvPr/>
-        </p:nvSpPr>
-        <p:spPr>
-          <a:xfrm>
-            <a:off x="502920" y="1298448"/>
-            <a:ext cx="11155680" cy="365760"/>
-          </a:xfrm>
-          <a:prstGeom prst="rect">
-            <a:avLst/>
-          </a:prstGeom>
-          <a:noFill/>
-        </p:spPr>
-        <p:txBody>
-          <a:bodyPr wrap="square" anchor="ctr" lIns="0" rIns="0" tIns="0" bIns="0">
-            <a:spAutoFit/>
-          </a:bodyPr>
-          <a:lstStyle/>
-          <a:p>
-            <a:r>
-              <a:rPr sz="1250" b="0" i="1">
-                <a:solidFill>
-                  <a:srgbClr val="8592A3"/>
-                </a:solidFill>
-                <a:latin typeface="Calibri"/>
-              </a:rPr>
-              <a:t>Small edits at the edges of a program are routine — editing the geometry in the middle is CAM's job.</a:t>
-            </a:r>
-          </a:p>
-        </p:txBody>
-      </p:sp>
-      <p:sp>
-        <p:nvSpPr>
-          <p:cNvPr id="5" name="TextBox 4"/>
-          <p:cNvSpPr txBox="1"/>
-          <p:nvPr/>
-        </p:nvSpPr>
-        <p:spPr>
-          <a:xfrm>
-            <a:off x="502920" y="6565392"/>
-            <a:ext cx="9000000" cy="256032"/>
-          </a:xfrm>
-          <a:prstGeom prst="rect">
-            <a:avLst/>
-          </a:prstGeom>
-          <a:noFill/>
-        </p:spPr>
-        <p:txBody>
-          <a:bodyPr wrap="square" anchor="ctr" lIns="0" rIns="0" tIns="0" bIns="0">
-            <a:spAutoFit/>
-          </a:bodyPr>
-          <a:lstStyle/>
-          <a:p>
-            <a:r>
-              <a:rPr sz="850" b="0" i="0">
-                <a:solidFill>
-                  <a:srgbClr val="8592A3"/>
-                </a:solidFill>
-                <a:latin typeface="Calibri"/>
-              </a:rPr>
-              <a:t>MECH 151 · Technical Design — Unit Reference Guide</a:t>
-            </a:r>
-          </a:p>
-        </p:txBody>
-      </p:sp>
-      <p:sp>
-        <p:nvSpPr>
-          <p:cNvPr id="6" name="TextBox 5"/>
-          <p:cNvSpPr txBox="1"/>
-          <p:nvPr/>
-        </p:nvSpPr>
-        <p:spPr>
-          <a:xfrm>
-            <a:off x="502920" y="1902240"/>
-            <a:ext cx="6035040" cy="219456"/>
-          </a:xfrm>
-          <a:prstGeom prst="rect">
-            <a:avLst/>
-          </a:prstGeom>
-          <a:noFill/>
-        </p:spPr>
-        <p:txBody>
-          <a:bodyPr wrap="square" anchor="ctr" lIns="0" rIns="0" tIns="0" bIns="0">
-            <a:spAutoFit/>
-          </a:bodyPr>
-          <a:lstStyle/>
-          <a:p>
-            <a:r>
-              <a:rPr sz="1150" b="1" i="1">
-                <a:solidFill>
-                  <a:srgbClr val="8592A3"/>
-                </a:solidFill>
-                <a:latin typeface="Calibri"/>
-              </a:rPr>
-              <a:t>A short program, annotated</a:t>
-            </a:r>
-          </a:p>
-        </p:txBody>
-      </p:sp>
-      <p:sp>
-        <p:nvSpPr>
-          <p:cNvPr id="7" name="Rounded Rectangle 6"/>
-          <p:cNvSpPr/>
-          <p:nvPr/>
-        </p:nvSpPr>
-        <p:spPr>
-          <a:xfrm>
-            <a:off x="502920" y="2176560"/>
-            <a:ext cx="6035040" cy="3247320"/>
-          </a:xfrm>
-          <a:prstGeom prst="roundRect">
-            <a:avLst>
-              <a:gd name="adj" fmla="val 3500"/>
-            </a:avLst>
-          </a:prstGeom>
-          <a:solidFill>
-            <a:srgbClr val="F3F6F9"/>
-          </a:solidFill>
-          <a:ln w="12700">
-            <a:solidFill>
-              <a:srgbClr val="E1E7EE"/>
-            </a:solidFill>
-          </a:ln>
-          <a:effectLst/>
-        </p:spPr>
-        <p:style>
-          <a:lnRef idx="1">
-            <a:schemeClr val="accent1"/>
-          </a:lnRef>
-          <a:fillRef idx="3">
-            <a:schemeClr val="accent1"/>
-          </a:fillRef>
-          <a:effectRef idx="2">
-            <a:schemeClr val="accent1"/>
-          </a:effectRef>
-          <a:fontRef idx="minor">
-            <a:schemeClr val="lt1"/>
-          </a:fontRef>
-        </p:style>
-        <p:txBody>
-          <a:bodyPr rtlCol="0" anchor="ctr"/>
-          <a:lstStyle/>
-          <a:p>
-            <a:pPr algn="ctr"/>
-          </a:p>
-        </p:txBody>
-      </p:sp>
-      <p:sp>
-        <p:nvSpPr>
-          <p:cNvPr id="8" name="TextBox 7"/>
-          <p:cNvSpPr txBox="1"/>
-          <p:nvPr/>
-        </p:nvSpPr>
-        <p:spPr>
-          <a:xfrm>
-            <a:off x="822920" y="2436560"/>
-            <a:ext cx="5475040" cy="2787320"/>
-          </a:xfrm>
-          <a:prstGeom prst="rect">
-            <a:avLst/>
-          </a:prstGeom>
-          <a:noFill/>
-        </p:spPr>
-        <p:txBody>
-          <a:bodyPr wrap="square" anchor="t" lIns="0" rIns="0" tIns="0" bIns="0">
-            <a:spAutoFit/>
-          </a:bodyPr>
-          <a:lstStyle/>
-          <a:p>
-            <a:pPr>
-              <a:lnSpc>
-                <a:spcPct val="115000"/>
-              </a:lnSpc>
-              <a:spcAft>
-                <a:spcPts val="400"/>
-              </a:spcAft>
-            </a:pPr>
-            <a:r>
-              <a:rPr sz="1000" b="0" i="1">
-                <a:solidFill>
-                  <a:srgbClr val="8592A3"/>
-                </a:solidFill>
-                <a:latin typeface="Consolas"/>
-              </a:rPr>
-              <a:t>(SLOT — 6MM 2-FLUTE ENDMILL)</a:t>
-            </a:r>
-          </a:p>
-          <a:p>
-            <a:pPr>
-              <a:lnSpc>
-                <a:spcPct val="115000"/>
-              </a:lnSpc>
-              <a:spcAft>
-                <a:spcPts val="400"/>
-              </a:spcAft>
-            </a:pPr>
-            <a:r>
-              <a:rPr sz="1000" b="1" i="0">
-                <a:solidFill>
-                  <a:srgbClr val="0F2942"/>
-                </a:solidFill>
-                <a:latin typeface="Consolas"/>
-              </a:rPr>
-              <a:t>G21 G90 G17    </a:t>
-            </a:r>
-            <a:r>
-              <a:rPr sz="1000" b="0" i="0">
-                <a:solidFill>
-                  <a:srgbClr val="8592A3"/>
-                </a:solidFill>
-                <a:latin typeface="Consolas"/>
-              </a:rPr>
-              <a:t>mm, absolute, XY plane</a:t>
-            </a:r>
-          </a:p>
-          <a:p>
-            <a:pPr>
-              <a:lnSpc>
-                <a:spcPct val="115000"/>
-              </a:lnSpc>
-              <a:spcAft>
-                <a:spcPts val="400"/>
-              </a:spcAft>
-            </a:pPr>
-            <a:r>
-              <a:rPr sz="1000" b="1" i="0">
-                <a:solidFill>
-                  <a:srgbClr val="0F2942"/>
-                </a:solidFill>
-                <a:latin typeface="Consolas"/>
-              </a:rPr>
-              <a:t>G54            </a:t>
-            </a:r>
-            <a:r>
-              <a:rPr sz="1000" b="0" i="0">
-                <a:solidFill>
-                  <a:srgbClr val="8592A3"/>
-                </a:solidFill>
-                <a:latin typeface="Consolas"/>
-              </a:rPr>
-              <a:t>work offset = part zero</a:t>
-            </a:r>
-          </a:p>
-          <a:p>
-            <a:pPr>
-              <a:lnSpc>
-                <a:spcPct val="115000"/>
-              </a:lnSpc>
-              <a:spcAft>
-                <a:spcPts val="400"/>
-              </a:spcAft>
-            </a:pPr>
-            <a:r>
-              <a:rPr sz="1000" b="1" i="0">
-                <a:solidFill>
-                  <a:srgbClr val="0F2942"/>
-                </a:solidFill>
-                <a:latin typeface="Consolas"/>
-              </a:rPr>
-              <a:t>G0 Z5.0        </a:t>
-            </a:r>
-            <a:r>
-              <a:rPr sz="1000" b="0" i="0">
-                <a:solidFill>
-                  <a:srgbClr val="8592A3"/>
-                </a:solidFill>
-                <a:latin typeface="Consolas"/>
-              </a:rPr>
-              <a:t>rapid to safe height</a:t>
-            </a:r>
-          </a:p>
-          <a:p>
-            <a:pPr>
-              <a:lnSpc>
-                <a:spcPct val="115000"/>
-              </a:lnSpc>
-              <a:spcAft>
-                <a:spcPts val="400"/>
-              </a:spcAft>
-            </a:pPr>
-            <a:r>
-              <a:rPr sz="1000" b="1" i="0">
-                <a:solidFill>
-                  <a:srgbClr val="0F2942"/>
-                </a:solidFill>
-                <a:latin typeface="Consolas"/>
-              </a:rPr>
-              <a:t>M3 S10600      </a:t>
-            </a:r>
-            <a:r>
-              <a:rPr sz="1000" b="0" i="0">
-                <a:solidFill>
-                  <a:srgbClr val="8592A3"/>
-                </a:solidFill>
-                <a:latin typeface="Consolas"/>
-              </a:rPr>
-              <a:t>spindle on CW, 10600 rpm</a:t>
-            </a:r>
-          </a:p>
-          <a:p>
-            <a:pPr>
-              <a:lnSpc>
-                <a:spcPct val="115000"/>
-              </a:lnSpc>
-              <a:spcAft>
-                <a:spcPts val="400"/>
-              </a:spcAft>
-            </a:pPr>
-            <a:r>
-              <a:rPr sz="1000" b="1" i="0">
-                <a:solidFill>
-                  <a:srgbClr val="0F2942"/>
-                </a:solidFill>
-                <a:latin typeface="Consolas"/>
-              </a:rPr>
-              <a:t>G0 X0 Y0       </a:t>
-            </a:r>
-            <a:r>
-              <a:rPr sz="1000" b="0" i="0">
-                <a:solidFill>
-                  <a:srgbClr val="8592A3"/>
-                </a:solidFill>
-                <a:latin typeface="Consolas"/>
-              </a:rPr>
-              <a:t>rapid above the start</a:t>
-            </a:r>
-          </a:p>
-          <a:p>
-            <a:pPr>
-              <a:lnSpc>
-                <a:spcPct val="115000"/>
-              </a:lnSpc>
-              <a:spcAft>
-                <a:spcPts val="400"/>
-              </a:spcAft>
-            </a:pPr>
-            <a:r>
-              <a:rPr sz="1000" b="1" i="0">
-                <a:solidFill>
-                  <a:srgbClr val="0F2942"/>
-                </a:solidFill>
-                <a:latin typeface="Consolas"/>
-              </a:rPr>
-              <a:t>G1 Z-2.0 F300  </a:t>
-            </a:r>
-            <a:r>
-              <a:rPr sz="1000" b="0" i="0">
-                <a:solidFill>
-                  <a:srgbClr val="8592A3"/>
-                </a:solidFill>
-                <a:latin typeface="Consolas"/>
-              </a:rPr>
-              <a:t>feed down to depth</a:t>
-            </a:r>
-          </a:p>
-          <a:p>
-            <a:pPr>
-              <a:lnSpc>
-                <a:spcPct val="115000"/>
-              </a:lnSpc>
-              <a:spcAft>
-                <a:spcPts val="400"/>
-              </a:spcAft>
-            </a:pPr>
-            <a:r>
-              <a:rPr sz="1000" b="1" i="0">
-                <a:solidFill>
-                  <a:srgbClr val="0F2942"/>
-                </a:solidFill>
-                <a:latin typeface="Consolas"/>
-              </a:rPr>
-              <a:t>G1 X50.0 F640  </a:t>
-            </a:r>
-            <a:r>
-              <a:rPr sz="1000" b="0" i="0">
-                <a:solidFill>
-                  <a:srgbClr val="8592A3"/>
-                </a:solidFill>
-                <a:latin typeface="Consolas"/>
-              </a:rPr>
-              <a:t>cut the slot at feed</a:t>
-            </a:r>
-          </a:p>
-          <a:p>
-            <a:pPr>
-              <a:lnSpc>
-                <a:spcPct val="115000"/>
-              </a:lnSpc>
-              <a:spcAft>
-                <a:spcPts val="400"/>
-              </a:spcAft>
-            </a:pPr>
-            <a:r>
-              <a:rPr sz="1000" b="1" i="0">
-                <a:solidFill>
-                  <a:srgbClr val="0F2942"/>
-                </a:solidFill>
-                <a:latin typeface="Consolas"/>
-              </a:rPr>
-              <a:t>G0 Z5.0        </a:t>
-            </a:r>
-            <a:r>
-              <a:rPr sz="1000" b="0" i="0">
-                <a:solidFill>
-                  <a:srgbClr val="8592A3"/>
-                </a:solidFill>
-                <a:latin typeface="Consolas"/>
-              </a:rPr>
-              <a:t>retract</a:t>
-            </a:r>
-          </a:p>
-          <a:p>
-            <a:pPr>
-              <a:lnSpc>
-                <a:spcPct val="115000"/>
-              </a:lnSpc>
-              <a:spcAft>
-                <a:spcPts val="400"/>
-              </a:spcAft>
-            </a:pPr>
-            <a:r>
-              <a:rPr sz="1000" b="1" i="0">
-                <a:solidFill>
-                  <a:srgbClr val="0F2942"/>
-                </a:solidFill>
-                <a:latin typeface="Consolas"/>
-              </a:rPr>
-              <a:t>M5             </a:t>
-            </a:r>
-            <a:r>
-              <a:rPr sz="1000" b="0" i="0">
-                <a:solidFill>
-                  <a:srgbClr val="8592A3"/>
-                </a:solidFill>
-                <a:latin typeface="Consolas"/>
-              </a:rPr>
-              <a:t>spindle off</a:t>
-            </a:r>
-          </a:p>
-          <a:p>
-            <a:pPr>
-              <a:lnSpc>
-                <a:spcPct val="115000"/>
-              </a:lnSpc>
-              <a:spcAft>
-                <a:spcPts val="400"/>
-              </a:spcAft>
-            </a:pPr>
-            <a:r>
-              <a:rPr sz="1000" b="1" i="0">
-                <a:solidFill>
-                  <a:srgbClr val="0F2942"/>
-                </a:solidFill>
-                <a:latin typeface="Consolas"/>
-              </a:rPr>
-              <a:t>M30            </a:t>
-            </a:r>
-            <a:r>
-              <a:rPr sz="1000" b="0" i="0">
-                <a:solidFill>
-                  <a:srgbClr val="8592A3"/>
-                </a:solidFill>
-                <a:latin typeface="Consolas"/>
-              </a:rPr>
-              <a:t>end of program</a:t>
-            </a:r>
-          </a:p>
-        </p:txBody>
-      </p:sp>
-      <p:sp>
-        <p:nvSpPr>
-          <p:cNvPr id="9" name="Rounded Rectangle 8"/>
-          <p:cNvSpPr/>
-          <p:nvPr/>
-        </p:nvSpPr>
-        <p:spPr>
-          <a:xfrm>
-            <a:off x="6748920" y="2176560"/>
-            <a:ext cx="4954680" cy="1783080"/>
-          </a:xfrm>
-          <a:prstGeom prst="roundRect">
-            <a:avLst>
-              <a:gd name="adj" fmla="val 4500"/>
-            </a:avLst>
-          </a:prstGeom>
-          <a:solidFill>
-            <a:srgbClr val="F3F6F9"/>
-          </a:solidFill>
-          <a:ln w="15875">
-            <a:solidFill>
-              <a:srgbClr val="1B8A8A"/>
-            </a:solidFill>
-          </a:ln>
-          <a:effectLst/>
-        </p:spPr>
-        <p:style>
-          <a:lnRef idx="1">
-            <a:schemeClr val="accent1"/>
-          </a:lnRef>
-          <a:fillRef idx="3">
-            <a:schemeClr val="accent1"/>
-          </a:fillRef>
-          <a:effectRef idx="2">
-            <a:schemeClr val="accent1"/>
-          </a:effectRef>
-          <a:fontRef idx="minor">
-            <a:schemeClr val="lt1"/>
-          </a:fontRef>
-        </p:style>
-        <p:txBody>
-          <a:bodyPr rtlCol="0" anchor="ctr"/>
-          <a:lstStyle/>
-          <a:p>
-            <a:pPr algn="ctr"/>
-          </a:p>
-        </p:txBody>
-      </p:sp>
-      <p:sp>
-        <p:nvSpPr>
-          <p:cNvPr id="10" name="TextBox 9"/>
-          <p:cNvSpPr txBox="1"/>
-          <p:nvPr/>
-        </p:nvSpPr>
-        <p:spPr>
-          <a:xfrm>
-            <a:off x="6977520" y="2340000"/>
-            <a:ext cx="4497480" cy="1560000"/>
-          </a:xfrm>
-          <a:prstGeom prst="rect">
-            <a:avLst/>
-          </a:prstGeom>
-          <a:noFill/>
-        </p:spPr>
-        <p:txBody>
-          <a:bodyPr wrap="square" anchor="t" lIns="0" rIns="0" tIns="0" bIns="0">
-            <a:spAutoFit/>
-          </a:bodyPr>
-          <a:lstStyle/>
-          <a:p>
-            <a:pPr>
-              <a:spcAft>
-                <a:spcPts val="500"/>
-              </a:spcAft>
-            </a:pPr>
-            <a:r>
-              <a:rPr sz="1400" b="1" i="0">
-                <a:solidFill>
-                  <a:srgbClr val="1B8A8A"/>
-                </a:solidFill>
-                <a:latin typeface="Cambria"/>
-              </a:rPr>
-              <a:t>Safe to edit by hand</a:t>
-            </a:r>
-          </a:p>
-          <a:p>
-            <a:pPr marL="274320" indent="-274320">
-              <a:lnSpc>
-                <a:spcPct val="105000"/>
-              </a:lnSpc>
-              <a:spcAft>
-                <a:spcPts val="350"/>
-              </a:spcAft>
-              <a:buChar char="●"/>
-            </a:pPr>
-            <a:r>
-              <a:rPr sz="1000" b="0" i="0">
-                <a:solidFill>
-                  <a:srgbClr val="44536B"/>
-                </a:solidFill>
-                <a:latin typeface="Calibri"/>
-              </a:rPr>
-              <a:t>Feed (F) and spindle speed (S) — ease off for chatter or burning</a:t>
-            </a:r>
-          </a:p>
-          <a:p>
-            <a:pPr marL="274320" indent="-274320">
-              <a:lnSpc>
-                <a:spcPct val="105000"/>
-              </a:lnSpc>
-              <a:spcAft>
-                <a:spcPts val="350"/>
-              </a:spcAft>
-              <a:buChar char="●"/>
-            </a:pPr>
-            <a:r>
-              <a:rPr sz="1000" b="0" i="0">
-                <a:solidFill>
-                  <a:srgbClr val="44536B"/>
-                </a:solidFill>
-                <a:latin typeface="Calibri"/>
-              </a:rPr>
-              <a:t>Safe / clearance Z heights — after checking nothing is taller</a:t>
-            </a:r>
-          </a:p>
-          <a:p>
-            <a:pPr marL="274320" indent="-274320">
-              <a:lnSpc>
-                <a:spcPct val="105000"/>
-              </a:lnSpc>
-              <a:spcAft>
-                <a:spcPts val="350"/>
-              </a:spcAft>
-              <a:buChar char="●"/>
-            </a:pPr>
-            <a:r>
-              <a:rPr sz="1000" b="0" i="0">
-                <a:solidFill>
-                  <a:srgbClr val="44536B"/>
-                </a:solidFill>
-                <a:latin typeface="Calibri"/>
-              </a:rPr>
-              <a:t>Work offset (G54→G55); add a pause (M00) or dwell (G04)</a:t>
-            </a:r>
-          </a:p>
-          <a:p>
-            <a:pPr marL="274320" indent="-274320">
-              <a:lnSpc>
-                <a:spcPct val="105000"/>
-              </a:lnSpc>
-              <a:spcAft>
-                <a:spcPts val="350"/>
-              </a:spcAft>
-              <a:buChar char="●"/>
-            </a:pPr>
-            <a:r>
-              <a:rPr sz="1000" b="0" i="0">
-                <a:solidFill>
-                  <a:srgbClr val="44536B"/>
-                </a:solidFill>
-                <a:latin typeface="Calibri"/>
-              </a:rPr>
-              <a:t>Trim header/footer lines your machine doesn't use; drop an unused tool section</a:t>
-            </a:r>
-          </a:p>
-        </p:txBody>
-      </p:sp>
-      <p:sp>
-        <p:nvSpPr>
-          <p:cNvPr id="11" name="Rounded Rectangle 10"/>
-          <p:cNvSpPr/>
-          <p:nvPr/>
-        </p:nvSpPr>
-        <p:spPr>
-          <a:xfrm>
-            <a:off x="6748920" y="4133088"/>
-            <a:ext cx="4954680" cy="1430000"/>
-          </a:xfrm>
-          <a:prstGeom prst="roundRect">
-            <a:avLst>
-              <a:gd name="adj" fmla="val 4500"/>
-            </a:avLst>
-          </a:prstGeom>
-          <a:solidFill>
-            <a:srgbClr val="F3F6F9"/>
-          </a:solidFill>
-          <a:ln w="15875">
-            <a:solidFill>
-              <a:srgbClr val="C0392B"/>
-            </a:solidFill>
-          </a:ln>
-          <a:effectLst/>
-        </p:spPr>
-        <p:style>
-          <a:lnRef idx="1">
-            <a:schemeClr val="accent1"/>
-          </a:lnRef>
-          <a:fillRef idx="3">
-            <a:schemeClr val="accent1"/>
-          </a:fillRef>
-          <a:effectRef idx="2">
-            <a:schemeClr val="accent1"/>
-          </a:effectRef>
-          <a:fontRef idx="minor">
-            <a:schemeClr val="lt1"/>
-          </a:fontRef>
-        </p:style>
-        <p:txBody>
-          <a:bodyPr rtlCol="0" anchor="ctr"/>
-          <a:lstStyle/>
-          <a:p>
-            <a:pPr algn="ctr"/>
-          </a:p>
-        </p:txBody>
-      </p:sp>
-      <p:sp>
-        <p:nvSpPr>
-          <p:cNvPr id="12" name="TextBox 11"/>
-          <p:cNvSpPr txBox="1"/>
-          <p:nvPr/>
-        </p:nvSpPr>
-        <p:spPr>
-          <a:xfrm>
-            <a:off x="6977520" y="4286040"/>
-            <a:ext cx="4497480" cy="1230000"/>
-          </a:xfrm>
-          <a:prstGeom prst="rect">
-            <a:avLst/>
-          </a:prstGeom>
-          <a:noFill/>
-        </p:spPr>
-        <p:txBody>
-          <a:bodyPr wrap="square" anchor="t" lIns="0" rIns="0" tIns="0" bIns="0">
-            <a:spAutoFit/>
-          </a:bodyPr>
-          <a:lstStyle/>
-          <a:p>
-            <a:pPr>
-              <a:spcAft>
-                <a:spcPts val="500"/>
-              </a:spcAft>
-            </a:pPr>
-            <a:r>
-              <a:rPr sz="1400" b="1" i="0">
-                <a:solidFill>
-                  <a:srgbClr val="C0392B"/>
-                </a:solidFill>
-                <a:latin typeface="Cambria"/>
-              </a:rPr>
-              <a:t>Regenerate from CAM — don't hand-edit</a:t>
-            </a:r>
-          </a:p>
-          <a:p>
-            <a:pPr marL="274320" indent="-274320">
-              <a:lnSpc>
-                <a:spcPct val="105000"/>
-              </a:lnSpc>
-              <a:spcAft>
-                <a:spcPts val="350"/>
-              </a:spcAft>
-              <a:buChar char="●"/>
-            </a:pPr>
-            <a:r>
-              <a:rPr sz="1000" b="0" i="0">
-                <a:solidFill>
-                  <a:srgbClr val="44536B"/>
-                </a:solidFill>
-                <a:latin typeface="Calibri"/>
-              </a:rPr>
-              <a:t>Individual X / Y / Z cutting values, or arc I / J centres</a:t>
-            </a:r>
-          </a:p>
-          <a:p>
-            <a:pPr marL="274320" indent="-274320">
-              <a:lnSpc>
-                <a:spcPct val="105000"/>
-              </a:lnSpc>
-              <a:spcAft>
-                <a:spcPts val="350"/>
-              </a:spcAft>
-              <a:buChar char="●"/>
-            </a:pPr>
-            <a:r>
-              <a:rPr sz="1000" b="0" i="0">
-                <a:solidFill>
-                  <a:srgbClr val="44536B"/>
-                </a:solidFill>
-                <a:latin typeface="Calibri"/>
-              </a:rPr>
-              <a:t>Switching units (G20 ↔ G21) partway through</a:t>
-            </a:r>
-          </a:p>
-          <a:p>
-            <a:pPr marL="274320" indent="-274320">
-              <a:lnSpc>
-                <a:spcPct val="105000"/>
-              </a:lnSpc>
-              <a:spcAft>
-                <a:spcPts val="350"/>
-              </a:spcAft>
-              <a:buChar char="●"/>
-            </a:pPr>
-            <a:r>
-              <a:rPr sz="1000" b="0" i="0">
-                <a:solidFill>
-                  <a:srgbClr val="44536B"/>
-                </a:solidFill>
-                <a:latin typeface="Calibri"/>
-              </a:rPr>
-              <a:t>Cutter compensation (G41 / G42) offsets</a:t>
-            </a:r>
-          </a:p>
-        </p:txBody>
-      </p:sp>
-      <p:sp>
-        <p:nvSpPr>
-          <p:cNvPr id="13" name="Rounded Rectangle 12"/>
-          <p:cNvSpPr/>
-          <p:nvPr/>
-        </p:nvSpPr>
-        <p:spPr>
-          <a:xfrm>
-            <a:off x="502920" y="5989320"/>
-            <a:ext cx="11201400" cy="466344"/>
-          </a:xfrm>
-          <a:prstGeom prst="roundRect">
-            <a:avLst>
-              <a:gd name="adj" fmla="val 14000"/>
-            </a:avLst>
-          </a:prstGeom>
-          <a:solidFill>
-            <a:srgbClr val="F3F6F9"/>
-          </a:solidFill>
-          <a:ln w="15875">
-            <a:solidFill>
-              <a:srgbClr val="C0392B"/>
-            </a:solidFill>
-          </a:ln>
-          <a:effectLst/>
-        </p:spPr>
-        <p:style>
-          <a:lnRef idx="1">
-            <a:schemeClr val="accent1"/>
-          </a:lnRef>
-          <a:fillRef idx="3">
-            <a:schemeClr val="accent1"/>
-          </a:fillRef>
-          <a:effectRef idx="2">
-            <a:schemeClr val="accent1"/>
-          </a:effectRef>
-          <a:fontRef idx="minor">
-            <a:schemeClr val="lt1"/>
-          </a:fontRef>
-        </p:style>
-        <p:txBody>
-          <a:bodyPr rtlCol="0" anchor="ctr"/>
-          <a:lstStyle/>
-          <a:p>
-            <a:pPr algn="ctr"/>
-          </a:p>
-        </p:txBody>
-      </p:sp>
-      <p:sp>
-        <p:nvSpPr>
-          <p:cNvPr id="14" name="TextBox 13"/>
-          <p:cNvSpPr txBox="1"/>
-          <p:nvPr/>
-        </p:nvSpPr>
-        <p:spPr>
-          <a:xfrm>
-            <a:off x="731520" y="5989320"/>
-            <a:ext cx="10744200" cy="466344"/>
-          </a:xfrm>
-          <a:prstGeom prst="rect">
-            <a:avLst/>
-          </a:prstGeom>
-          <a:noFill/>
-        </p:spPr>
-        <p:txBody>
-          <a:bodyPr wrap="square" anchor="ctr" lIns="0" rIns="0" tIns="0" bIns="0">
-            <a:spAutoFit/>
-          </a:bodyPr>
-          <a:lstStyle/>
-          <a:p>
-            <a:pPr>
-              <a:lnSpc>
-                <a:spcPct val="112000"/>
-              </a:lnSpc>
-            </a:pPr>
-            <a:r>
-              <a:rPr sz="1200" b="1" i="0">
-                <a:solidFill>
-                  <a:srgbClr val="C0392B"/>
-                </a:solidFill>
-                <a:latin typeface="Calibri"/>
-              </a:rPr>
-              <a:t>Prove it before it cuts:  </a:t>
-            </a:r>
-            <a:r>
-              <a:rPr sz="1200" b="0" i="0">
-                <a:solidFill>
-                  <a:srgbClr val="44536B"/>
-                </a:solidFill>
-                <a:latin typeface="Calibri"/>
-              </a:rPr>
-              <a:t>re-simulate the whole program, then run it once as an air pass with a hand on the feed-hold — a G-code error is found by the machine at full speed.</a:t>
-            </a:r>
-          </a:p>
-        </p:txBody>
-      </p:sp>
-    </p:spTree>
-  </p:cSld>
-  <p:clrMapOvr>
-    <a:masterClrMapping/>
-  </p:clrMapOvr>
-</p:sld>
-</file>
-
-<file path=ppt/slides/slide51.xml><?xml version="1.0" encoding="utf-8"?>
 <p:sld xmlns:a="http://schemas.openxmlformats.org/drawingml/2006/main" xmlns:r="http://schemas.openxmlformats.org/officeDocument/2006/relationships" xmlns:p="http://schemas.openxmlformats.org/presentationml/2006/main">
   <p:cSld name="Slide 52">
     <p:bg>
@@ -47571,7 +46073,7 @@
 </p:sld>
 </file>
 
-<file path=ppt/slides/slide52.xml><?xml version="1.0" encoding="utf-8"?>
+<file path=ppt/slides/slide51.xml><?xml version="1.0" encoding="utf-8"?>
 <p:sld xmlns:a="http://schemas.openxmlformats.org/drawingml/2006/main" xmlns:r="http://schemas.openxmlformats.org/officeDocument/2006/relationships" xmlns:p="http://schemas.openxmlformats.org/presentationml/2006/main">
   <p:cSld name="Slide 53">
     <p:bg>
@@ -48660,7 +47162,7 @@
 </p:sld>
 </file>
 
-<file path=ppt/slides/slide53.xml><?xml version="1.0" encoding="utf-8"?>
+<file path=ppt/slides/slide52.xml><?xml version="1.0" encoding="utf-8"?>
 <p:sld xmlns:a="http://schemas.openxmlformats.org/drawingml/2006/main" xmlns:r="http://schemas.openxmlformats.org/officeDocument/2006/relationships" xmlns:p="http://schemas.openxmlformats.org/presentationml/2006/main">
   <p:cSld name="Slide 54">
     <p:bg>
@@ -49536,7 +48038,7 @@
                 <a:ea typeface="Calibri" pitchFamily="34" charset="-122"/>
                 <a:cs typeface="Calibri" pitchFamily="34" charset="-120"/>
               </a:rPr>
-              <a:t>Unit 3 Quiz (Week 16). The physical prototype build &amp; presentation is graded separately as the course Final Exam.</a:t>
+              <a:t>Unit 3 Competency Check (Week 16). The physical prototype build &amp; presentation is graded separately as the course Final Exam.</a:t>
             </a:r>
             <a:endParaRPr lang="en-US" sz="1200" dirty="0"/>
           </a:p>
@@ -49550,7 +48052,7 @@
 </p:sld>
 </file>
 
-<file path=ppt/slides/slide54.xml><?xml version="1.0" encoding="utf-8"?>
+<file path=ppt/slides/slide53.xml><?xml version="1.0" encoding="utf-8"?>
 <p:sld xmlns:a="http://schemas.openxmlformats.org/drawingml/2006/main" xmlns:r="http://schemas.openxmlformats.org/officeDocument/2006/relationships" xmlns:p="http://schemas.openxmlformats.org/presentationml/2006/main">
   <p:cSld name="Slide 55">
     <p:bg>
@@ -50196,7 +48698,7 @@
                 <a:ea typeface="Calibri" pitchFamily="34" charset="-122"/>
                 <a:cs typeface="Calibri" pitchFamily="34" charset="-120"/>
               </a:rPr>
-              <a:t>Quiz, Wk 8</a:t>
+              <a:t>Competency Check, Wk 8</a:t>
             </a:r>
             <a:endParaRPr lang="en-US" sz="1050" dirty="0"/>
           </a:p>
@@ -50377,7 +48879,7 @@
                 <a:ea typeface="Calibri" pitchFamily="34" charset="-122"/>
                 <a:cs typeface="Calibri" pitchFamily="34" charset="-120"/>
               </a:rPr>
-              <a:t>Threads &amp; fasteners, mates, joining methods, exploded drawing + BOM, DFA principles</a:t>
+              <a:t>Threads &amp; fasteners, mates, joining methods, DFA principles</a:t>
             </a:r>
             <a:endParaRPr lang="en-US" sz="1050" dirty="0"/>
           </a:p>
@@ -50419,7 +48921,7 @@
                 <a:ea typeface="Calibri" pitchFamily="34" charset="-122"/>
                 <a:cs typeface="Calibri" pitchFamily="34" charset="-120"/>
               </a:rPr>
-              <a:t>Quiz, Wk 11</a:t>
+              <a:t>Competency Check, Wk 11</a:t>
             </a:r>
             <a:endParaRPr lang="en-US" sz="1050" dirty="0"/>
           </a:p>
@@ -50642,7 +49144,7 @@
                 <a:ea typeface="Calibri" pitchFamily="34" charset="-122"/>
                 <a:cs typeface="Calibri" pitchFamily="34" charset="-120"/>
               </a:rPr>
-              <a:t>Quiz, Wk 16</a:t>
+              <a:t>Competency Check, Wk 16</a:t>
             </a:r>
             <a:endParaRPr lang="en-US" sz="1050" dirty="0"/>
           </a:p>
